--- a/curso/pptx/S20.pptx
+++ b/curso/pptx/S20.pptx
@@ -3891,8 +3891,8 @@
         </p:nvSpPr>
         <p:spPr>
           <a:xfrm>
-            <a:off x="640000" y="420000"/>
-            <a:ext cx="10912000" cy="420000"/>
+            <a:off x="10652000" y="380000"/>
+            <a:ext cx="900000" cy="800000"/>
           </a:xfrm>
           <a:prstGeom prst="rect">
             <a:avLst/>
@@ -3907,17 +3907,17 @@
           <a:p>
             <a:pPr>
               <a:spcAft>
-                <a:spcPts val="810"/>
-              </a:spcAft>
-            </a:pPr>
-            <a:r>
-              <a:rPr sz="1800" b="1">
+                <a:spcPts val="1980"/>
+              </a:spcAft>
+            </a:pPr>
+            <a:r>
+              <a:rPr sz="4400" b="0">
                 <a:solidFill>
                   <a:srgbClr val="1F2A44"/>
                 </a:solidFill>
                 <a:latin typeface="Nunito Sans"/>
               </a:rPr>
-              <a:t>🦉 Aula de Filosofía</a:t>
+              <a:t>🙃</a:t>
             </a:r>
           </a:p>
         </p:txBody>

--- a/curso/pptx/S20.pptx
+++ b/curso/pptx/S20.pptx
@@ -472,426 +472,6 @@
     </a:lvl9pPr>
   </p:notesStyle>
 </p:notesMaster>
-</file>
-
-<file path=ppt/notesSlides/notesSlide1.xml><?xml version="1.0" encoding="utf-8"?>
-<p:notes xmlns:a="http://schemas.openxmlformats.org/drawingml/2006/main" xmlns:p="http://schemas.openxmlformats.org/presentationml/2006/main" xmlns:r="http://schemas.openxmlformats.org/officeDocument/2006/relationships">
-  <p:cSld>
-    <p:spTree>
-      <p:nvGrpSpPr>
-        <p:cNvPr id="1" name=""/>
-        <p:cNvGrpSpPr/>
-        <p:nvPr/>
-      </p:nvGrpSpPr>
-      <p:grpSpPr>
-        <a:xfrm>
-          <a:off x="0" y="0"/>
-          <a:ext cx="0" cy="0"/>
-          <a:chOff x="0" y="0"/>
-          <a:chExt cx="0" cy="0"/>
-        </a:xfrm>
-      </p:grpSpPr>
-      <p:sp>
-        <p:nvSpPr>
-          <p:cNvPr id="2" name="Slide Image Placeholder 1"/>
-          <p:cNvSpPr>
-            <a:spLocks noGrp="1"/>
-          </p:cNvSpPr>
-          <p:nvPr>
-            <p:ph type="sldImg" idx="2"/>
-          </p:nvPr>
-        </p:nvSpPr>
-        <p:spPr/>
-      </p:sp>
-      <p:sp>
-        <p:nvSpPr>
-          <p:cNvPr id="3" name="Notes Placeholder 2"/>
-          <p:cNvSpPr>
-            <a:spLocks noGrp="1"/>
-          </p:cNvSpPr>
-          <p:nvPr>
-            <p:ph type="body" idx="3" sz="quarter"/>
-          </p:nvPr>
-        </p:nvSpPr>
-        <p:spPr/>
-        <p:txBody>
-          <a:bodyPr/>
-          <a:lstStyle/>
-          <a:p>
-            <a:r>
-              <a:t>3 minutos. Sin apuntes. Es para recordar, no cuenta para nota.</a:t>
-            </a:r>
-          </a:p>
-        </p:txBody>
-      </p:sp>
-      <p:sp>
-        <p:nvSpPr>
-          <p:cNvPr id="4" name="Slide Number Placeholder 3"/>
-          <p:cNvSpPr>
-            <a:spLocks noGrp="1"/>
-          </p:cNvSpPr>
-          <p:nvPr>
-            <p:ph type="sldNum" idx="5" sz="quarter"/>
-          </p:nvPr>
-        </p:nvSpPr>
-        <p:spPr/>
-      </p:sp>
-    </p:spTree>
-  </p:cSld>
-  <p:clrMapOvr>
-    <a:masterClrMapping/>
-  </p:clrMapOvr>
-</p:notes>
-</file>
-
-<file path=ppt/notesSlides/notesSlide2.xml><?xml version="1.0" encoding="utf-8"?>
-<p:notes xmlns:a="http://schemas.openxmlformats.org/drawingml/2006/main" xmlns:p="http://schemas.openxmlformats.org/presentationml/2006/main" xmlns:r="http://schemas.openxmlformats.org/officeDocument/2006/relationships">
-  <p:cSld>
-    <p:spTree>
-      <p:nvGrpSpPr>
-        <p:cNvPr id="1" name=""/>
-        <p:cNvGrpSpPr/>
-        <p:nvPr/>
-      </p:nvGrpSpPr>
-      <p:grpSpPr>
-        <a:xfrm>
-          <a:off x="0" y="0"/>
-          <a:ext cx="0" cy="0"/>
-          <a:chOff x="0" y="0"/>
-          <a:chExt cx="0" cy="0"/>
-        </a:xfrm>
-      </p:grpSpPr>
-      <p:sp>
-        <p:nvSpPr>
-          <p:cNvPr id="2" name="Slide Image Placeholder 1"/>
-          <p:cNvSpPr>
-            <a:spLocks noGrp="1"/>
-          </p:cNvSpPr>
-          <p:nvPr>
-            <p:ph type="sldImg" idx="2"/>
-          </p:nvPr>
-        </p:nvSpPr>
-        <p:spPr/>
-      </p:sp>
-      <p:sp>
-        <p:nvSpPr>
-          <p:cNvPr id="3" name="Notes Placeholder 2"/>
-          <p:cNvSpPr>
-            <a:spLocks noGrp="1"/>
-          </p:cNvSpPr>
-          <p:nvPr>
-            <p:ph type="body" idx="3" sz="quarter"/>
-          </p:nvPr>
-        </p:nvSpPr>
-        <p:spPr/>
-        <p:txBody>
-          <a:bodyPr/>
-          <a:lstStyle/>
-          <a:p>
-            <a:r>
-              <a:t>3 minutos. Sin apuntes. Es para recordar, no cuenta para nota.</a:t>
-            </a:r>
-          </a:p>
-        </p:txBody>
-      </p:sp>
-      <p:sp>
-        <p:nvSpPr>
-          <p:cNvPr id="4" name="Slide Number Placeholder 3"/>
-          <p:cNvSpPr>
-            <a:spLocks noGrp="1"/>
-          </p:cNvSpPr>
-          <p:nvPr>
-            <p:ph type="sldNum" idx="5" sz="quarter"/>
-          </p:nvPr>
-        </p:nvSpPr>
-        <p:spPr/>
-      </p:sp>
-    </p:spTree>
-  </p:cSld>
-  <p:clrMapOvr>
-    <a:masterClrMapping/>
-  </p:clrMapOvr>
-</p:notes>
-</file>
-
-<file path=ppt/notesSlides/notesSlide3.xml><?xml version="1.0" encoding="utf-8"?>
-<p:notes xmlns:a="http://schemas.openxmlformats.org/drawingml/2006/main" xmlns:p="http://schemas.openxmlformats.org/presentationml/2006/main" xmlns:r="http://schemas.openxmlformats.org/officeDocument/2006/relationships">
-  <p:cSld>
-    <p:spTree>
-      <p:nvGrpSpPr>
-        <p:cNvPr id="1" name=""/>
-        <p:cNvGrpSpPr/>
-        <p:nvPr/>
-      </p:nvGrpSpPr>
-      <p:grpSpPr>
-        <a:xfrm>
-          <a:off x="0" y="0"/>
-          <a:ext cx="0" cy="0"/>
-          <a:chOff x="0" y="0"/>
-          <a:chExt cx="0" cy="0"/>
-        </a:xfrm>
-      </p:grpSpPr>
-      <p:sp>
-        <p:nvSpPr>
-          <p:cNvPr id="2" name="Slide Image Placeholder 1"/>
-          <p:cNvSpPr>
-            <a:spLocks noGrp="1"/>
-          </p:cNvSpPr>
-          <p:nvPr>
-            <p:ph type="sldImg" idx="2"/>
-          </p:nvPr>
-        </p:nvSpPr>
-        <p:spPr/>
-      </p:sp>
-      <p:sp>
-        <p:nvSpPr>
-          <p:cNvPr id="3" name="Notes Placeholder 2"/>
-          <p:cNvSpPr>
-            <a:spLocks noGrp="1"/>
-          </p:cNvSpPr>
-          <p:nvPr>
-            <p:ph type="body" idx="3" sz="quarter"/>
-          </p:nvPr>
-        </p:nvSpPr>
-        <p:spPr/>
-        <p:txBody>
-          <a:bodyPr/>
-          <a:lstStyle/>
-          <a:p>
-            <a:r>
-              <a:t>Nadie tiene que contestar: solo pensarlo.</a:t>
-            </a:r>
-          </a:p>
-        </p:txBody>
-      </p:sp>
-      <p:sp>
-        <p:nvSpPr>
-          <p:cNvPr id="4" name="Slide Number Placeholder 3"/>
-          <p:cNvSpPr>
-            <a:spLocks noGrp="1"/>
-          </p:cNvSpPr>
-          <p:nvPr>
-            <p:ph type="sldNum" idx="5" sz="quarter"/>
-          </p:nvPr>
-        </p:nvSpPr>
-        <p:spPr/>
-      </p:sp>
-    </p:spTree>
-  </p:cSld>
-  <p:clrMapOvr>
-    <a:masterClrMapping/>
-  </p:clrMapOvr>
-</p:notes>
-</file>
-
-<file path=ppt/notesSlides/notesSlide4.xml><?xml version="1.0" encoding="utf-8"?>
-<p:notes xmlns:a="http://schemas.openxmlformats.org/drawingml/2006/main" xmlns:p="http://schemas.openxmlformats.org/presentationml/2006/main" xmlns:r="http://schemas.openxmlformats.org/officeDocument/2006/relationships">
-  <p:cSld>
-    <p:spTree>
-      <p:nvGrpSpPr>
-        <p:cNvPr id="1" name=""/>
-        <p:cNvGrpSpPr/>
-        <p:nvPr/>
-      </p:nvGrpSpPr>
-      <p:grpSpPr>
-        <a:xfrm>
-          <a:off x="0" y="0"/>
-          <a:ext cx="0" cy="0"/>
-          <a:chOff x="0" y="0"/>
-          <a:chExt cx="0" cy="0"/>
-        </a:xfrm>
-      </p:grpSpPr>
-      <p:sp>
-        <p:nvSpPr>
-          <p:cNvPr id="2" name="Slide Image Placeholder 1"/>
-          <p:cNvSpPr>
-            <a:spLocks noGrp="1"/>
-          </p:cNvSpPr>
-          <p:nvPr>
-            <p:ph type="sldImg" idx="2"/>
-          </p:nvPr>
-        </p:nvSpPr>
-        <p:spPr/>
-      </p:sp>
-      <p:sp>
-        <p:nvSpPr>
-          <p:cNvPr id="3" name="Notes Placeholder 2"/>
-          <p:cNvSpPr>
-            <a:spLocks noGrp="1"/>
-          </p:cNvSpPr>
-          <p:nvPr>
-            <p:ph type="body" idx="3" sz="quarter"/>
-          </p:nvPr>
-        </p:nvSpPr>
-        <p:spPr/>
-        <p:txBody>
-          <a:bodyPr/>
-          <a:lstStyle/>
-          <a:p>
-            <a:r>
-              <a:t>Dejar unos segundos para que piensen la respuesta fácil antes de enseñar los pasos.</a:t>
-            </a:r>
-          </a:p>
-        </p:txBody>
-      </p:sp>
-      <p:sp>
-        <p:nvSpPr>
-          <p:cNvPr id="4" name="Slide Number Placeholder 3"/>
-          <p:cNvSpPr>
-            <a:spLocks noGrp="1"/>
-          </p:cNvSpPr>
-          <p:nvPr>
-            <p:ph type="sldNum" idx="5" sz="quarter"/>
-          </p:nvPr>
-        </p:nvSpPr>
-        <p:spPr/>
-      </p:sp>
-    </p:spTree>
-  </p:cSld>
-  <p:clrMapOvr>
-    <a:masterClrMapping/>
-  </p:clrMapOvr>
-</p:notes>
-</file>
-
-<file path=ppt/notesSlides/notesSlide5.xml><?xml version="1.0" encoding="utf-8"?>
-<p:notes xmlns:a="http://schemas.openxmlformats.org/drawingml/2006/main" xmlns:p="http://schemas.openxmlformats.org/presentationml/2006/main" xmlns:r="http://schemas.openxmlformats.org/officeDocument/2006/relationships">
-  <p:cSld>
-    <p:spTree>
-      <p:nvGrpSpPr>
-        <p:cNvPr id="1" name=""/>
-        <p:cNvGrpSpPr/>
-        <p:nvPr/>
-      </p:nvGrpSpPr>
-      <p:grpSpPr>
-        <a:xfrm>
-          <a:off x="0" y="0"/>
-          <a:ext cx="0" cy="0"/>
-          <a:chOff x="0" y="0"/>
-          <a:chExt cx="0" cy="0"/>
-        </a:xfrm>
-      </p:grpSpPr>
-      <p:sp>
-        <p:nvSpPr>
-          <p:cNvPr id="2" name="Slide Image Placeholder 1"/>
-          <p:cNvSpPr>
-            <a:spLocks noGrp="1"/>
-          </p:cNvSpPr>
-          <p:nvPr>
-            <p:ph type="sldImg" idx="2"/>
-          </p:nvPr>
-        </p:nvSpPr>
-        <p:spPr/>
-      </p:sp>
-      <p:sp>
-        <p:nvSpPr>
-          <p:cNvPr id="3" name="Notes Placeholder 2"/>
-          <p:cNvSpPr>
-            <a:spLocks noGrp="1"/>
-          </p:cNvSpPr>
-          <p:nvPr>
-            <p:ph type="body" idx="3" sz="quarter"/>
-          </p:nvPr>
-        </p:nvSpPr>
-        <p:spPr/>
-        <p:txBody>
-          <a:bodyPr/>
-          <a:lstStyle/>
-          <a:p>
-            <a:r>
-              <a:t>Dejar 2 minutos para que lo escriban. La diapositiva siguiente muestra el resumen.</a:t>
-            </a:r>
-          </a:p>
-        </p:txBody>
-      </p:sp>
-      <p:sp>
-        <p:nvSpPr>
-          <p:cNvPr id="4" name="Slide Number Placeholder 3"/>
-          <p:cNvSpPr>
-            <a:spLocks noGrp="1"/>
-          </p:cNvSpPr>
-          <p:nvPr>
-            <p:ph type="sldNum" idx="5" sz="quarter"/>
-          </p:nvPr>
-        </p:nvSpPr>
-        <p:spPr/>
-      </p:sp>
-    </p:spTree>
-  </p:cSld>
-  <p:clrMapOvr>
-    <a:masterClrMapping/>
-  </p:clrMapOvr>
-</p:notes>
-</file>
-
-<file path=ppt/notesSlides/notesSlide6.xml><?xml version="1.0" encoding="utf-8"?>
-<p:notes xmlns:a="http://schemas.openxmlformats.org/drawingml/2006/main" xmlns:p="http://schemas.openxmlformats.org/presentationml/2006/main" xmlns:r="http://schemas.openxmlformats.org/officeDocument/2006/relationships">
-  <p:cSld>
-    <p:spTree>
-      <p:nvGrpSpPr>
-        <p:cNvPr id="1" name=""/>
-        <p:cNvGrpSpPr/>
-        <p:nvPr/>
-      </p:nvGrpSpPr>
-      <p:grpSpPr>
-        <a:xfrm>
-          <a:off x="0" y="0"/>
-          <a:ext cx="0" cy="0"/>
-          <a:chOff x="0" y="0"/>
-          <a:chExt cx="0" cy="0"/>
-        </a:xfrm>
-      </p:grpSpPr>
-      <p:sp>
-        <p:nvSpPr>
-          <p:cNvPr id="2" name="Slide Image Placeholder 1"/>
-          <p:cNvSpPr>
-            <a:spLocks noGrp="1"/>
-          </p:cNvSpPr>
-          <p:nvPr>
-            <p:ph type="sldImg" idx="2"/>
-          </p:nvPr>
-        </p:nvSpPr>
-        <p:spPr/>
-      </p:sp>
-      <p:sp>
-        <p:nvSpPr>
-          <p:cNvPr id="3" name="Notes Placeholder 2"/>
-          <p:cNvSpPr>
-            <a:spLocks noGrp="1"/>
-          </p:cNvSpPr>
-          <p:nvPr>
-            <p:ph type="body" idx="3" sz="quarter"/>
-          </p:nvPr>
-        </p:nvSpPr>
-        <p:spPr/>
-        <p:txBody>
-          <a:bodyPr/>
-          <a:lstStyle/>
-          <a:p>
-            <a:r>
-              <a:t>Buscar: «falso dilema falacia» · «falso dilema ejemplos»</a:t>
-            </a:r>
-          </a:p>
-        </p:txBody>
-      </p:sp>
-      <p:sp>
-        <p:nvSpPr>
-          <p:cNvPr id="4" name="Slide Number Placeholder 3"/>
-          <p:cNvSpPr>
-            <a:spLocks noGrp="1"/>
-          </p:cNvSpPr>
-          <p:nvPr>
-            <p:ph type="sldNum" idx="5" sz="quarter"/>
-          </p:nvPr>
-        </p:nvSpPr>
-        <p:spPr/>
-      </p:sp>
-    </p:spTree>
-  </p:cSld>
-  <p:clrMapOvr>
-    <a:masterClrMapping/>
-  </p:clrMapOvr>
-</p:notes>
 </file>
 
 <file path=ppt/slideLayouts/slideLayout1.xml><?xml version="1.0" encoding="utf-8"?>

--- a/curso/pptx/S20.pptx
+++ b/curso/pptx/S20.pptx
@@ -3800,7 +3800,7 @@
                 </a:solidFill>
                 <a:latin typeface="Nunito Sans"/>
               </a:rPr>
-              <a:t>El padre de Dylan: «O dejas los videojuegos para siempre, o vas a suspender todo».</a:t>
+              <a:t>El padre de un chico: «O dejas los videojuegos para siempre, o vas a suspender todo».</a:t>
             </a:r>
           </a:p>
         </p:txBody>
@@ -4109,7 +4109,7 @@
                 </a:solidFill>
                 <a:latin typeface="Nunito Sans"/>
               </a:rPr>
-              <a:t>Leire tiene entrada para un concierto y para un partido. Los dos son el sábado a las seis, en sitios distintos de Bilbao.</a:t>
+              <a:t>Una chica tiene entrada para un concierto y para un partido. Los dos son el sábado a las seis, en sitios distintos de Bilbao.</a:t>
             </a:r>
           </a:p>
         </p:txBody>
@@ -4418,7 +4418,7 @@
                 </a:solidFill>
                 <a:latin typeface="Nunito Sans"/>
               </a:rPr>
-              <a:t>El VAR revisa una jugada: «O el balón ha cruzado entera la línea, o no la ha cruzado». Kevin: «¡Falso dilema! Solo da dos opciones».</a:t>
+              <a:t>El VAR revisa una jugada: «O el balón ha cruzado entera la línea, o no la ha cruzado». Un chico: «¡Falso dilema! Solo da dos opciones».</a:t>
             </a:r>
           </a:p>
         </p:txBody>
@@ -4466,7 +4466,7 @@
                 </a:solidFill>
                 <a:latin typeface="Nunito Sans"/>
               </a:rPr>
-              <a:t>Tiene la forma «o… o…». ¿Tiene razón Kevin?</a:t>
+              <a:t>Tiene la forma «o… o…». ¿Tiene razón ese chico?</a:t>
             </a:r>
           </a:p>
           <a:p>
@@ -6694,7 +6694,7 @@
                 </a:solidFill>
                 <a:latin typeface="Nunito Sans"/>
               </a:rPr>
-              <a:t>Mensaje de la cuadrilla: «O vienes a Aste Nagusia toda la noche, o es que ya no eres de los nuestros».</a:t>
+              <a:t>Mensaje que recibe una chica de su cuadrilla: «O vienes a Aste Nagusia toda la noche, o es que ya no eres de las nuestras».</a:t>
             </a:r>
           </a:p>
         </p:txBody>
@@ -7717,7 +7717,7 @@
                 </a:solidFill>
                 <a:latin typeface="Nunito Sans"/>
               </a:rPr>
-              <a:t>Mensaje de la cuadrilla: «O vienes a Aste Nagusia toda la noche, o es que ya no eres de los nuestros».</a:t>
+              <a:t>Mensaje que recibe una chica de su cuadrilla: «O vienes a Aste Nagusia toda la noche, o es que ya no eres de las nuestras».</a:t>
             </a:r>
           </a:p>
         </p:txBody>
@@ -7765,7 +7765,7 @@
                 </a:solidFill>
                 <a:latin typeface="Nunito Sans"/>
               </a:rPr>
-              <a:t>¿Qué dos opciones me dan? Ir toda la noche, o dejar de ser de la cuadrilla.</a:t>
+              <a:t>¿Qué dos opciones le dan a esa chica? Ir toda la noche, o dejar de ser de la cuadrilla.</a:t>
             </a:r>
           </a:p>
           <a:p>
@@ -7815,7 +7815,7 @@
                 </a:solidFill>
                 <a:latin typeface="Nunito Sans"/>
               </a:rPr>
-              <a:t>¿Para qué sirve el dilema? Para empujarme: la otra opción da miedo.</a:t>
+              <a:t>¿Para qué sirve el dilema? Para empujarla: la otra opción da miedo.</a:t>
             </a:r>
           </a:p>
           <a:p>

--- a/curso/pptx/S20.pptx
+++ b/curso/pptx/S20.pptx
@@ -23,6 +23,7 @@
     <p:sldId id="271" r:id="rId23"/>
     <p:sldId id="272" r:id="rId24"/>
     <p:sldId id="273" r:id="rId25"/>
+    <p:sldId id="274" r:id="rId26"/>
   </p:sldIdLst>
   <p:sldSz cx="12192000" cy="6858000" type="screen4x3"/>
   <p:notesSz cx="6858000" cy="9144000"/>
@@ -3536,7 +3537,7 @@
                 </a:solidFill>
                 <a:latin typeface="Nunito Sans"/>
               </a:rPr>
-              <a:t>PENSAMIENTO CRÍTICO · SESIÓN 20 · UNIDAD 4 · FALACIAS II: RAZONAR MAL</a:t>
+              <a:t>PENSAMIENTO CRÍTICO · SESIÓN 20 · UNIDAD 4 · FALACIAS I: ATACAR, DESVIAR, EMOCIONAR</a:t>
             </a:r>
           </a:p>
         </p:txBody>
@@ -3575,7 +3576,7 @@
                 </a:solidFill>
                 <a:latin typeface="Fredoka"/>
               </a:rPr>
-              <a:t>Falso dilema</a:t>
+              <a:t>Ataque a la persona</a:t>
             </a:r>
           </a:p>
         </p:txBody>
@@ -3614,7 +3615,7 @@
                 </a:solidFill>
                 <a:latin typeface="Nunito Sans"/>
               </a:rPr>
-              <a:t>El falso dilema presenta solo dos opciones, como si fueran las únicas, cuando en realidad hay más salidas.</a:t>
+              <a:t>Atacar a quien habla, o decirle que él también lo hace, no demuestra que su idea sea falsa.</a:t>
             </a:r>
           </a:p>
         </p:txBody>
@@ -3718,7 +3719,7 @@
                 </a:solidFill>
                 <a:latin typeface="Fredoka"/>
               </a:rPr>
-              <a:t>Caso 2 · En casa</a:t>
+              <a:t>Caso 1 · El recreo</a:t>
             </a:r>
           </a:p>
         </p:txBody>
@@ -3800,7 +3801,7 @@
                 </a:solidFill>
                 <a:latin typeface="Nunito Sans"/>
               </a:rPr>
-              <a:t>El padre de un chico: «O dejas los videojuegos para siempre, o vas a suspender todo».</a:t>
+              <a:t>Una chica propone alargar el recreo cinco minutos. Un chico: «Tú qué vas a proponer, si eres nueva y no sabes ni dónde está el gimnasio».</a:t>
             </a:r>
           </a:p>
         </p:txBody>
@@ -3848,7 +3849,7 @@
                 </a:solidFill>
                 <a:latin typeface="Nunito Sans"/>
               </a:rPr>
-              <a:t>¿Qué dos opciones? Dejarlos para siempre o suspenderlo todo.</a:t>
+              <a:t>¿Qué propone la chica? Alargar el recreo.</a:t>
             </a:r>
           </a:p>
           <a:p>
@@ -3873,7 +3874,7 @@
                 </a:solidFill>
                 <a:latin typeface="Nunito Sans"/>
               </a:rPr>
-              <a:t>¿Tercera opción? Jugar menos: una hora, solo el fin de semana, después de estudiar.</a:t>
+              <a:t>¿Qué responde el chico? Habla de la chica, no del recreo.</a:t>
             </a:r>
           </a:p>
           <a:p>
@@ -3898,7 +3899,7 @@
                 </a:solidFill>
                 <a:latin typeface="Nunito Sans"/>
               </a:rPr>
-              <a:t>¿La preocupación es real? Puede que sí: si juega mucho, estudia menos.</a:t>
+              <a:t>¿Qué tiene que ver ser nueva con la idea? Nada: la idea es buena o mala igual.</a:t>
             </a:r>
           </a:p>
           <a:p>
@@ -3923,7 +3924,7 @@
                 </a:solidFill>
                 <a:latin typeface="Nunito Sans"/>
               </a:rPr>
-              <a:t>Conclusión: falso dilema. El problema puede ser real; lo falso es que solo haya dos salidas.</a:t>
+              <a:t>Conclusión: ataque a la persona. La propuesta de la chica sigue sin respuesta.</a:t>
             </a:r>
           </a:p>
         </p:txBody>
@@ -4027,7 +4028,7 @@
                 </a:solidFill>
                 <a:latin typeface="Fredoka"/>
               </a:rPr>
-              <a:t>Caso 3 · Un dilema de verdad</a:t>
+              <a:t>Caso 2 · «Tú también», en casa</a:t>
             </a:r>
           </a:p>
         </p:txBody>
@@ -4109,7 +4110,7 @@
                 </a:solidFill>
                 <a:latin typeface="Nunito Sans"/>
               </a:rPr>
-              <a:t>Una chica tiene entrada para un concierto y para un partido. Los dos son el sábado a las seis, en sitios distintos de Bilbao.</a:t>
+              <a:t>La madre de una chica: «Deja ya el móvil, llevas tres horas». La chica: «¡Pues anda que tú, siempre con el WhatsApp!».</a:t>
             </a:r>
           </a:p>
         </p:txBody>
@@ -4157,7 +4158,7 @@
                 </a:solidFill>
                 <a:latin typeface="Nunito Sans"/>
               </a:rPr>
-              <a:t>¿Qué dos opciones tiene? El concierto o el partido.</a:t>
+              <a:t>¿Qué dice la madre? Que tres horas de móvil son demasiadas.</a:t>
             </a:r>
           </a:p>
           <a:p>
@@ -4182,7 +4183,7 @@
                 </a:solidFill>
                 <a:latin typeface="Nunito Sans"/>
               </a:rPr>
-              <a:t>¿Puede ir a los dos? No: es a la misma hora y en sitios distintos.</a:t>
+              <a:t>¿Qué responde la chica? Que su madre también lo usa mucho.</a:t>
             </a:r>
           </a:p>
           <a:p>
@@ -4207,7 +4208,7 @@
                 </a:solidFill>
                 <a:latin typeface="Nunito Sans"/>
               </a:rPr>
-              <a:t>Podría no ir a ninguno, pero no puede tener los dos: elegir una opción le impide la otra.</a:t>
+              <a:t>¿Eso cambia algo? Si la madre también se pasa, el consejo sirve para las dos.</a:t>
             </a:r>
           </a:p>
           <a:p>
@@ -4232,7 +4233,7 @@
                 </a:solidFill>
                 <a:latin typeface="Nunito Sans"/>
               </a:rPr>
-              <a:t>Conclusión: no es falso dilema. A veces solo hay dos opciones de verdad.</a:t>
+              <a:t>Conclusión: «tú también». Puede ser cierto, pero no responde a la crítica.</a:t>
             </a:r>
           </a:p>
         </p:txBody>
@@ -4251,7 +4252,7 @@
     <p:bg>
       <p:bgPr>
         <a:solidFill>
-          <a:srgbClr val="F6C9A8"/>
+          <a:srgbClr val="FBF7EF"/>
         </a:solidFill>
         <a:effectLst/>
       </p:bgPr>
@@ -4293,11 +4294,11 @@
             <a:r>
               <a:rPr sz="1400" b="1">
                 <a:solidFill>
-                  <a:srgbClr val="1F2A44"/>
-                </a:solidFill>
-                <a:latin typeface="Nunito Sans"/>
-              </a:rPr>
-              <a:t>CASO TRAMPA · BLOQUE 2 · CASOS RESUELTOS</a:t>
+                  <a:srgbClr val="E8793A"/>
+                </a:solidFill>
+                <a:latin typeface="Nunito Sans"/>
+              </a:rPr>
+              <a:t>BLOQUE 2 · CASOS RESUELTOS</a:t>
             </a:r>
           </a:p>
         </p:txBody>
@@ -4336,7 +4337,7 @@
                 </a:solidFill>
                 <a:latin typeface="Fredoka"/>
               </a:rPr>
-              <a:t>⚠ ¿Gol o no gol?</a:t>
+              <a:t>Caso 3 · Cuando la persona sí importa</a:t>
             </a:r>
           </a:p>
         </p:txBody>
@@ -4356,7 +4357,7 @@
             <a:avLst/>
           </a:prstGeom>
           <a:solidFill>
-            <a:srgbClr val="FBF7EF"/>
+            <a:srgbClr val="FFFFFF"/>
           </a:solidFill>
           <a:ln>
             <a:noFill/>
@@ -4418,7 +4419,7 @@
                 </a:solidFill>
                 <a:latin typeface="Nunito Sans"/>
               </a:rPr>
-              <a:t>El VAR revisa una jugada: «O el balón ha cruzado entera la línea, o no la ha cruzado». Un chico: «¡Falso dilema! Solo da dos opciones».</a:t>
+              <a:t>Un vídeo dice que unas pastillas quitan el acné en tres días. Quien lo dice es el dueño de la marca que las vende.</a:t>
             </a:r>
           </a:p>
         </p:txBody>
@@ -4466,7 +4467,7 @@
                 </a:solidFill>
                 <a:latin typeface="Nunito Sans"/>
               </a:rPr>
-              <a:t>Tiene la forma «o… o…». ¿Tiene razón ese chico?</a:t>
+              <a:t>¿Habla de la persona? Sí: dice que gana dinero vendiéndolas.</a:t>
             </a:r>
           </a:p>
           <a:p>
@@ -4491,7 +4492,7 @@
                 </a:solidFill>
                 <a:latin typeface="Nunito Sans"/>
               </a:rPr>
-              <a:t>Parece que sí: solo hay dos opciones y suena a «o… o…».</a:t>
+              <a:t>¿Viene a cuento? Sí: quien gana dinero puede exagerar. Es una razón para pedir pruebas.</a:t>
             </a:r>
           </a:p>
           <a:p>
@@ -4516,7 +4517,7 @@
                 </a:solidFill>
                 <a:latin typeface="Nunito Sans"/>
               </a:rPr>
-              <a:t>Busca la tercera: ¿medio gol? No existe. Si no ha cruzado entera, no ha cruzado.</a:t>
+              <a:t>Pero no demuestra que sea falso: solo que su palabra no basta.</a:t>
             </a:r>
           </a:p>
           <a:p>
@@ -4541,32 +4542,7 @@
                 </a:solidFill>
                 <a:latin typeface="Nunito Sans"/>
               </a:rPr>
-              <a:t>Cuando una opción es justo lo contrario de la otra («sí / no»), no queda sitio para una tercera.</a:t>
-            </a:r>
-          </a:p>
-          <a:p>
-            <a:pPr>
-              <a:spcAft>
-                <a:spcPts val="1080"/>
-              </a:spcAft>
-            </a:pPr>
-            <a:r>
-              <a:rPr sz="2400" b="1">
-                <a:solidFill>
-                  <a:srgbClr val="E8793A"/>
-                </a:solidFill>
-                <a:latin typeface="Nunito Sans"/>
-              </a:rPr>
-              <a:t>5. </a:t>
-            </a:r>
-            <a:r>
-              <a:rPr sz="2400" b="0">
-                <a:solidFill>
-                  <a:srgbClr val="1F2A44"/>
-                </a:solidFill>
-                <a:latin typeface="Nunito Sans"/>
-              </a:rPr>
-              <a:t>Conclusión: no es falacia. El «o… o…» es una pista; lo que cuenta es si de verdad hay más opciones.</a:t>
+              <a:t>Conclusión: no es ad hominem. Hablar de la persona vale si afecta a su fiabilidad.</a:t>
             </a:r>
           </a:p>
         </p:txBody>
@@ -4670,7 +4646,7 @@
                 </a:solidFill>
                 <a:latin typeface="Fredoka"/>
               </a:rPr>
-              <a:t>Dilema falso y dilema real</a:t>
+              <a:t>No todo es ataque a la persona</a:t>
             </a:r>
           </a:p>
         </p:txBody>
@@ -4735,7 +4711,7 @@
                 </a:solidFill>
                 <a:latin typeface="Nunito Sans"/>
               </a:rPr>
-              <a:t>BLOQUE 3 · DILEMA FALSO Y DILEMA REAL</a:t>
+              <a:t>BLOQUE 3 · NO TODO ES ATAQUE A LA PERSONA</a:t>
             </a:r>
           </a:p>
         </p:txBody>
@@ -4774,7 +4750,7 @@
                 </a:solidFill>
                 <a:latin typeface="Fredoka"/>
               </a:rPr>
-              <a:t>¿Falso o real?</a:t>
+              <a:t>¿Ataque o dato que viene a cuento?</a:t>
             </a:r>
           </a:p>
         </p:txBody>
@@ -4856,7 +4832,7 @@
                 </a:solidFill>
                 <a:latin typeface="Nunito Sans"/>
               </a:rPr>
-              <a:t>Falso dilema</a:t>
+              <a:t>Ataque a la persona</a:t>
             </a:r>
           </a:p>
         </p:txBody>
@@ -4904,7 +4880,7 @@
                 </a:solidFill>
                 <a:latin typeface="Nunito Sans"/>
               </a:rPr>
-              <a:t>«O todo o nada»</a:t>
+              <a:t>«No le hagas caso, es un friki»</a:t>
             </a:r>
           </a:p>
           <a:p>
@@ -4929,7 +4905,7 @@
                 </a:solidFill>
                 <a:latin typeface="Nunito Sans"/>
               </a:rPr>
-              <a:t>Esconde las opciones del medio</a:t>
+              <a:t>«Qué sabrá, si es de primero»</a:t>
             </a:r>
           </a:p>
           <a:p>
@@ -4954,7 +4930,7 @@
                 </a:solidFill>
                 <a:latin typeface="Nunito Sans"/>
               </a:rPr>
-              <a:t>Te empuja hacia la opción que quiere el otro</a:t>
+              <a:t>«Tú también lo haces, así que calla»</a:t>
             </a:r>
           </a:p>
         </p:txBody>
@@ -5036,7 +5012,7 @@
                 </a:solidFill>
                 <a:latin typeface="Nunito Sans"/>
               </a:rPr>
-              <a:t>Dilema real</a:t>
+              <a:t>Viene a cuento</a:t>
             </a:r>
           </a:p>
         </p:txBody>
@@ -5084,7 +5060,7 @@
                 </a:solidFill>
                 <a:latin typeface="Nunito Sans"/>
               </a:rPr>
-              <a:t>Las dos opciones son de verdad las únicas</a:t>
+              <a:t>«Lo vende él: pidamos pruebas»</a:t>
             </a:r>
           </a:p>
           <a:p>
@@ -5109,7 +5085,7 @@
                 </a:solidFill>
                 <a:latin typeface="Nunito Sans"/>
               </a:rPr>
-              <a:t>Elegir una impide la otra</a:t>
+              <a:t>«Ya nos mintió con esto: comprobémoslo»</a:t>
             </a:r>
           </a:p>
           <a:p>
@@ -5134,7 +5110,7 @@
                 </a:solidFill>
                 <a:latin typeface="Nunito Sans"/>
               </a:rPr>
-              <a:t>Se puede comprobar que no hay más</a:t>
+              <a:t>«No es médico: preguntemos a un médico»</a:t>
             </a:r>
           </a:p>
         </p:txBody>
@@ -5153,7 +5129,7 @@
     <p:bg>
       <p:bgPr>
         <a:solidFill>
-          <a:srgbClr val="FBF7EF"/>
+          <a:srgbClr val="F6C9A8"/>
         </a:solidFill>
         <a:effectLst/>
       </p:bgPr>
@@ -5195,11 +5171,11 @@
             <a:r>
               <a:rPr sz="1400" b="1">
                 <a:solidFill>
-                  <a:srgbClr val="E8793A"/>
-                </a:solidFill>
-                <a:latin typeface="Nunito Sans"/>
-              </a:rPr>
-              <a:t>LO DE HOY EN TRES LÍNEAS</a:t>
+                  <a:srgbClr val="1F2A44"/>
+                </a:solidFill>
+                <a:latin typeface="Nunito Sans"/>
+              </a:rPr>
+              <a:t>CASO TRAMPA · BLOQUE 3 · NO TODO ES ATAQUE A LA PERSONA</a:t>
             </a:r>
           </a:p>
         </p:txBody>
@@ -5238,21 +5214,103 @@
                 </a:solidFill>
                 <a:latin typeface="Fredoka"/>
               </a:rPr>
-              <a:t>Escríbelo tú primero, sin mirar</a:t>
-            </a:r>
-          </a:p>
-        </p:txBody>
-      </p:sp>
-      <p:sp>
-        <p:nvSpPr>
-          <p:cNvPr id="4" name="TextBox 3"/>
+              <a:t>⚠ ¿Siempre es «tú también»?</a:t>
+            </a:r>
+          </a:p>
+        </p:txBody>
+      </p:sp>
+      <p:sp>
+        <p:nvSpPr>
+          <p:cNvPr id="4" name="Rectangle 3"/>
+          <p:cNvSpPr/>
+          <p:nvPr/>
+        </p:nvSpPr>
+        <p:spPr>
+          <a:xfrm>
+            <a:off x="640000" y="1600000"/>
+            <a:ext cx="10912000" cy="1100000"/>
+          </a:xfrm>
+          <a:prstGeom prst="rect">
+            <a:avLst/>
+          </a:prstGeom>
+          <a:solidFill>
+            <a:srgbClr val="FBF7EF"/>
+          </a:solidFill>
+          <a:ln>
+            <a:noFill/>
+          </a:ln>
+        </p:spPr>
+        <p:style>
+          <a:lnRef idx="1">
+            <a:schemeClr val="accent1"/>
+          </a:lnRef>
+          <a:fillRef idx="3">
+            <a:schemeClr val="accent1"/>
+          </a:fillRef>
+          <a:effectRef idx="2">
+            <a:schemeClr val="accent1"/>
+          </a:effectRef>
+          <a:fontRef idx="minor">
+            <a:schemeClr val="lt1"/>
+          </a:fontRef>
+        </p:style>
+        <p:txBody>
+          <a:bodyPr rtlCol="0" anchor="ctr"/>
+          <a:lstStyle/>
+          <a:p>
+            <a:pPr algn="ctr"/>
+          </a:p>
+        </p:txBody>
+      </p:sp>
+      <p:sp>
+        <p:nvSpPr>
+          <p:cNvPr id="5" name="TextBox 4"/>
           <p:cNvSpPr txBox="1"/>
           <p:nvPr/>
         </p:nvSpPr>
         <p:spPr>
           <a:xfrm>
-            <a:off x="640000" y="1800000"/>
-            <a:ext cx="10912000" cy="1500000"/>
+            <a:off x="840000" y="1650000"/>
+            <a:ext cx="10512000" cy="1000000"/>
+          </a:xfrm>
+          <a:prstGeom prst="rect">
+            <a:avLst/>
+          </a:prstGeom>
+          <a:noFill/>
+        </p:spPr>
+        <p:txBody>
+          <a:bodyPr wrap="square" anchor="ctr">
+            <a:spAutoFit/>
+          </a:bodyPr>
+          <a:lstStyle/>
+          <a:p>
+            <a:pPr>
+              <a:spcAft>
+                <a:spcPts val="1170"/>
+              </a:spcAft>
+            </a:pPr>
+            <a:r>
+              <a:rPr sz="2600" b="1">
+                <a:solidFill>
+                  <a:srgbClr val="1F2A44"/>
+                </a:solidFill>
+                <a:latin typeface="Nunito Sans"/>
+              </a:rPr>
+              <a:t>Un chico, el delegado, pide en clase: «Respetad el turno de palabra». Luego interrumpe a todos. Una chica: «Pides respetar el turno y tú no lo respetas».</a:t>
+            </a:r>
+          </a:p>
+        </p:txBody>
+      </p:sp>
+      <p:sp>
+        <p:nvSpPr>
+          <p:cNvPr id="6" name="TextBox 5"/>
+          <p:cNvSpPr txBox="1"/>
+          <p:nvPr/>
+        </p:nvSpPr>
+        <p:spPr>
+          <a:xfrm>
+            <a:off x="640000" y="2900000"/>
+            <a:ext cx="10912000" cy="3500000"/>
           </a:xfrm>
           <a:prstGeom prst="rect">
             <a:avLst/>
@@ -5267,17 +5325,144 @@
           <a:p>
             <a:pPr>
               <a:spcAft>
-                <a:spcPts val="1170"/>
-              </a:spcAft>
-            </a:pPr>
-            <a:r>
-              <a:rPr sz="2600" b="0">
-                <a:solidFill>
-                  <a:srgbClr val="4A5568"/>
-                </a:solidFill>
-                <a:latin typeface="Nunito Sans"/>
-              </a:rPr>
-              <a:t>Dos minutos. Después lo comparamos.</a:t>
+                <a:spcPts val="1080"/>
+              </a:spcAft>
+            </a:pPr>
+            <a:r>
+              <a:rPr sz="2400" b="1">
+                <a:solidFill>
+                  <a:srgbClr val="E8793A"/>
+                </a:solidFill>
+                <a:latin typeface="Nunito Sans"/>
+              </a:rPr>
+              <a:t>1. </a:t>
+            </a:r>
+            <a:r>
+              <a:rPr sz="2400" b="0">
+                <a:solidFill>
+                  <a:srgbClr val="1F2A44"/>
+                </a:solidFill>
+                <a:latin typeface="Nunito Sans"/>
+              </a:rPr>
+              <a:t>Le devuelve la crítica. ¿Es la falacia «tú también»?</a:t>
+            </a:r>
+          </a:p>
+          <a:p>
+            <a:pPr>
+              <a:spcAft>
+                <a:spcPts val="1080"/>
+              </a:spcAft>
+            </a:pPr>
+            <a:r>
+              <a:rPr sz="2400" b="1">
+                <a:solidFill>
+                  <a:srgbClr val="E8793A"/>
+                </a:solidFill>
+                <a:latin typeface="Nunito Sans"/>
+              </a:rPr>
+              <a:t>2. </a:t>
+            </a:r>
+            <a:r>
+              <a:rPr sz="2400" b="0">
+                <a:solidFill>
+                  <a:srgbClr val="1F2A44"/>
+                </a:solidFill>
+                <a:latin typeface="Nunito Sans"/>
+              </a:rPr>
+              <a:t>La chica no dice que la norma sea mala. No la usa para librarse de cumplirla.</a:t>
+            </a:r>
+          </a:p>
+          <a:p>
+            <a:pPr>
+              <a:spcAft>
+                <a:spcPts val="1080"/>
+              </a:spcAft>
+            </a:pPr>
+            <a:r>
+              <a:rPr sz="2400" b="1">
+                <a:solidFill>
+                  <a:srgbClr val="E8793A"/>
+                </a:solidFill>
+                <a:latin typeface="Nunito Sans"/>
+              </a:rPr>
+              <a:t>3. </a:t>
+            </a:r>
+            <a:r>
+              <a:rPr sz="2400" b="0">
+                <a:solidFill>
+                  <a:srgbClr val="1F2A44"/>
+                </a:solidFill>
+                <a:latin typeface="Nunito Sans"/>
+              </a:rPr>
+              <a:t>Señala una </a:t>
+            </a:r>
+            <a:r>
+              <a:rPr sz="2400" b="1">
+                <a:solidFill>
+                  <a:srgbClr val="1F2A44"/>
+                </a:solidFill>
+                <a:latin typeface="Nunito Sans"/>
+              </a:rPr>
+              <a:t>incoherencia</a:t>
+            </a:r>
+            <a:r>
+              <a:rPr sz="2400" b="0">
+                <a:solidFill>
+                  <a:srgbClr val="1F2A44"/>
+                </a:solidFill>
+                <a:latin typeface="Nunito Sans"/>
+              </a:rPr>
+              <a:t> real: el delegado pide algo que él no hace.</a:t>
+            </a:r>
+          </a:p>
+          <a:p>
+            <a:pPr>
+              <a:spcAft>
+                <a:spcPts val="1080"/>
+              </a:spcAft>
+            </a:pPr>
+            <a:r>
+              <a:rPr sz="2400" b="1">
+                <a:solidFill>
+                  <a:srgbClr val="E8793A"/>
+                </a:solidFill>
+                <a:latin typeface="Nunito Sans"/>
+              </a:rPr>
+              <a:t>4. </a:t>
+            </a:r>
+            <a:r>
+              <a:rPr sz="2400" b="0">
+                <a:solidFill>
+                  <a:srgbClr val="1F2A44"/>
+                </a:solidFill>
+                <a:latin typeface="Nunito Sans"/>
+              </a:rPr>
+              <a:t>Y eso viene a cuento: un delegado tiene que dar ejemplo.</a:t>
+            </a:r>
+          </a:p>
+          <a:p>
+            <a:pPr>
+              <a:spcAft>
+                <a:spcPts val="1080"/>
+              </a:spcAft>
+            </a:pPr>
+            <a:r>
+              <a:rPr sz="2400" b="1">
+                <a:solidFill>
+                  <a:srgbClr val="E8793A"/>
+                </a:solidFill>
+                <a:latin typeface="Nunito Sans"/>
+              </a:rPr>
+              <a:t>5. </a:t>
+            </a:r>
+            <a:r>
+              <a:rPr sz="2400" b="0">
+                <a:solidFill>
+                  <a:srgbClr val="1F2A44"/>
+                </a:solidFill>
+                <a:latin typeface="Nunito Sans"/>
+              </a:rPr>
+              <a:t>Conclusión: señalar una incoherencia no es falacia. Lo sería decir: «entonces yo tampoco respeto el turno».</a:t>
             </a:r>
           </a:p>
         </p:txBody>
@@ -5355,8 +5540,8 @@
         </p:nvSpPr>
         <p:spPr>
           <a:xfrm>
-            <a:off x="640000" y="1300000"/>
-            <a:ext cx="10912000" cy="4800000"/>
+            <a:off x="640000" y="760000"/>
+            <a:ext cx="10912000" cy="800000"/>
           </a:xfrm>
           <a:prstGeom prst="rect">
             <a:avLst/>
@@ -5371,76 +5556,56 @@
           <a:p>
             <a:pPr>
               <a:spcAft>
-                <a:spcPts val="1350"/>
-              </a:spcAft>
-            </a:pPr>
-            <a:r>
-              <a:rPr sz="3000" b="1">
-                <a:solidFill>
-                  <a:srgbClr val="E8793A"/>
-                </a:solidFill>
-                <a:latin typeface="Nunito Sans"/>
-              </a:rPr>
-              <a:t>1. </a:t>
-            </a:r>
-            <a:r>
-              <a:rPr sz="3000" b="0">
+                <a:spcPts val="1710"/>
+              </a:spcAft>
+            </a:pPr>
+            <a:r>
+              <a:rPr sz="3800" b="1">
                 <a:solidFill>
                   <a:srgbClr val="1F2A44"/>
                 </a:solidFill>
-                <a:latin typeface="Nunito Sans"/>
-              </a:rPr>
-              <a:t>El falso dilema presenta solo dos opciones cuando en realidad hay más.</a:t>
-            </a:r>
-          </a:p>
-          <a:p>
-            <a:pPr>
-              <a:spcAft>
-                <a:spcPts val="1350"/>
-              </a:spcAft>
-            </a:pPr>
-            <a:r>
-              <a:rPr sz="3000" b="1">
-                <a:solidFill>
-                  <a:srgbClr val="E8793A"/>
-                </a:solidFill>
-                <a:latin typeface="Nunito Sans"/>
-              </a:rPr>
-              <a:t>2. </a:t>
-            </a:r>
-            <a:r>
-              <a:rPr sz="3000" b="0">
-                <a:solidFill>
-                  <a:srgbClr val="1F2A44"/>
-                </a:solidFill>
-                <a:latin typeface="Nunito Sans"/>
-              </a:rPr>
-              <a:t>Las otras salidas suelen estar en medio, en las dos a la vez o en otra distinta.</a:t>
-            </a:r>
-          </a:p>
-          <a:p>
-            <a:pPr>
-              <a:spcAft>
-                <a:spcPts val="1350"/>
-              </a:spcAft>
-            </a:pPr>
-            <a:r>
-              <a:rPr sz="3000" b="1">
-                <a:solidFill>
-                  <a:srgbClr val="E8793A"/>
-                </a:solidFill>
-                <a:latin typeface="Nunito Sans"/>
-              </a:rPr>
-              <a:t>3. </a:t>
-            </a:r>
-            <a:r>
-              <a:rPr sz="3000" b="0">
-                <a:solidFill>
-                  <a:srgbClr val="1F2A44"/>
-                </a:solidFill>
-                <a:latin typeface="Nunito Sans"/>
-              </a:rPr>
-              <a:t>Para desmontarlo: ¿seguro que no hay una tercera opción?</a:t>
+                <a:latin typeface="Fredoka"/>
+              </a:rPr>
+              <a:t>Escríbelo tú primero, sin mirar</a:t>
+            </a:r>
+          </a:p>
+        </p:txBody>
+      </p:sp>
+      <p:sp>
+        <p:nvSpPr>
+          <p:cNvPr id="4" name="TextBox 3"/>
+          <p:cNvSpPr txBox="1"/>
+          <p:nvPr/>
+        </p:nvSpPr>
+        <p:spPr>
+          <a:xfrm>
+            <a:off x="640000" y="1800000"/>
+            <a:ext cx="10912000" cy="1500000"/>
+          </a:xfrm>
+          <a:prstGeom prst="rect">
+            <a:avLst/>
+          </a:prstGeom>
+          <a:noFill/>
+        </p:spPr>
+        <p:txBody>
+          <a:bodyPr wrap="square">
+            <a:spAutoFit/>
+          </a:bodyPr>
+          <a:lstStyle/>
+          <a:p>
+            <a:pPr>
+              <a:spcAft>
+                <a:spcPts val="1170"/>
+              </a:spcAft>
+            </a:pPr>
+            <a:r>
+              <a:rPr sz="2600" b="0">
+                <a:solidFill>
+                  <a:srgbClr val="4A5568"/>
+                </a:solidFill>
+                <a:latin typeface="Nunito Sans"/>
+              </a:rPr>
+              <a:t>Dos minutos. Después lo comparamos.</a:t>
             </a:r>
           </a:p>
         </p:txBody>
@@ -5459,7 +5624,7 @@
     <p:bg>
       <p:bgPr>
         <a:solidFill>
-          <a:srgbClr val="1F2A44"/>
+          <a:srgbClr val="FBF7EF"/>
         </a:solidFill>
         <a:effectLst/>
       </p:bgPr>
@@ -5501,11 +5666,11 @@
             <a:r>
               <a:rPr sz="1400" b="1">
                 <a:solidFill>
-                  <a:srgbClr val="F4B183"/>
-                </a:solidFill>
-                <a:latin typeface="Nunito Sans"/>
-              </a:rPr>
-              <a:t>VÍDEO</a:t>
+                  <a:srgbClr val="E8793A"/>
+                </a:solidFill>
+                <a:latin typeface="Nunito Sans"/>
+              </a:rPr>
+              <a:t>LO DE HOY EN TRES LÍNEAS</a:t>
             </a:r>
           </a:p>
         </p:txBody>
@@ -5518,8 +5683,8 @@
         </p:nvSpPr>
         <p:spPr>
           <a:xfrm>
-            <a:off x="640000" y="760000"/>
-            <a:ext cx="10912000" cy="800000"/>
+            <a:off x="640000" y="1300000"/>
+            <a:ext cx="10912000" cy="4800000"/>
           </a:xfrm>
           <a:prstGeom prst="rect">
             <a:avLst/>
@@ -5534,56 +5699,76 @@
           <a:p>
             <a:pPr>
               <a:spcAft>
-                <a:spcPts val="1620"/>
-              </a:spcAft>
-            </a:pPr>
-            <a:r>
-              <a:rPr sz="3600" b="1">
-                <a:solidFill>
-                  <a:srgbClr val="FBF7EF"/>
-                </a:solidFill>
-                <a:latin typeface="Fredoka"/>
-              </a:rPr>
-              <a:t>La falacia del falso dilema</a:t>
-            </a:r>
-          </a:p>
-        </p:txBody>
-      </p:sp>
-      <p:sp>
-        <p:nvSpPr>
-          <p:cNvPr id="4" name="TextBox 3"/>
-          <p:cNvSpPr txBox="1"/>
-          <p:nvPr/>
-        </p:nvSpPr>
-        <p:spPr>
-          <a:xfrm>
-            <a:off x="640000" y="2200000"/>
-            <a:ext cx="10912000" cy="2000000"/>
-          </a:xfrm>
-          <a:prstGeom prst="rect">
-            <a:avLst/>
-          </a:prstGeom>
-          <a:noFill/>
-        </p:spPr>
-        <p:txBody>
-          <a:bodyPr wrap="square">
-            <a:spAutoFit/>
-          </a:bodyPr>
-          <a:lstStyle/>
-          <a:p>
-            <a:pPr>
-              <a:spcAft>
-                <a:spcPts val="1080"/>
-              </a:spcAft>
-            </a:pPr>
-            <a:r>
-              <a:rPr sz="2400" b="0">
-                <a:solidFill>
-                  <a:srgbClr val="C9D3E6"/>
-                </a:solidFill>
-                <a:latin typeface="Nunito Sans"/>
-              </a:rPr>
-              <a:t>Ver más ejemplos del «o esto o aquello» en anuncios y discusiones.</a:t>
+                <a:spcPts val="1350"/>
+              </a:spcAft>
+            </a:pPr>
+            <a:r>
+              <a:rPr sz="3000" b="1">
+                <a:solidFill>
+                  <a:srgbClr val="E8793A"/>
+                </a:solidFill>
+                <a:latin typeface="Nunito Sans"/>
+              </a:rPr>
+              <a:t>1. </a:t>
+            </a:r>
+            <a:r>
+              <a:rPr sz="3000" b="0">
+                <a:solidFill>
+                  <a:srgbClr val="1F2A44"/>
+                </a:solidFill>
+                <a:latin typeface="Nunito Sans"/>
+              </a:rPr>
+              <a:t>El ataque a la persona responde a quien habla, no a lo que dice.</a:t>
+            </a:r>
+          </a:p>
+          <a:p>
+            <a:pPr>
+              <a:spcAft>
+                <a:spcPts val="1350"/>
+              </a:spcAft>
+            </a:pPr>
+            <a:r>
+              <a:rPr sz="3000" b="1">
+                <a:solidFill>
+                  <a:srgbClr val="E8793A"/>
+                </a:solidFill>
+                <a:latin typeface="Nunito Sans"/>
+              </a:rPr>
+              <a:t>2. </a:t>
+            </a:r>
+            <a:r>
+              <a:rPr sz="3000" b="0">
+                <a:solidFill>
+                  <a:srgbClr val="1F2A44"/>
+                </a:solidFill>
+                <a:latin typeface="Nunito Sans"/>
+              </a:rPr>
+              <a:t>«Tú también» rechaza un consejo porque quien lo da tampoco lo cumple.</a:t>
+            </a:r>
+          </a:p>
+          <a:p>
+            <a:pPr>
+              <a:spcAft>
+                <a:spcPts val="1350"/>
+              </a:spcAft>
+            </a:pPr>
+            <a:r>
+              <a:rPr sz="3000" b="1">
+                <a:solidFill>
+                  <a:srgbClr val="E8793A"/>
+                </a:solidFill>
+                <a:latin typeface="Nunito Sans"/>
+              </a:rPr>
+              <a:t>3. </a:t>
+            </a:r>
+            <a:r>
+              <a:rPr sz="3000" b="0">
+                <a:solidFill>
+                  <a:srgbClr val="1F2A44"/>
+                </a:solidFill>
+                <a:latin typeface="Nunito Sans"/>
+              </a:rPr>
+              <a:t>Hablar de la persona vale solo si afecta a su fiabilidad: intereses, mentiras o saber del tema.</a:t>
             </a:r>
           </a:p>
         </p:txBody>
@@ -5648,6 +5833,149 @@
                 </a:solidFill>
                 <a:latin typeface="Nunito Sans"/>
               </a:rPr>
+              <a:t>VÍDEO</a:t>
+            </a:r>
+          </a:p>
+        </p:txBody>
+      </p:sp>
+      <p:sp>
+        <p:nvSpPr>
+          <p:cNvPr id="3" name="TextBox 2"/>
+          <p:cNvSpPr txBox="1"/>
+          <p:nvPr/>
+        </p:nvSpPr>
+        <p:spPr>
+          <a:xfrm>
+            <a:off x="640000" y="760000"/>
+            <a:ext cx="10912000" cy="800000"/>
+          </a:xfrm>
+          <a:prstGeom prst="rect">
+            <a:avLst/>
+          </a:prstGeom>
+          <a:noFill/>
+        </p:spPr>
+        <p:txBody>
+          <a:bodyPr wrap="square">
+            <a:spAutoFit/>
+          </a:bodyPr>
+          <a:lstStyle/>
+          <a:p>
+            <a:pPr>
+              <a:spcAft>
+                <a:spcPts val="1620"/>
+              </a:spcAft>
+            </a:pPr>
+            <a:r>
+              <a:rPr sz="3600" b="1">
+                <a:solidFill>
+                  <a:srgbClr val="FBF7EF"/>
+                </a:solidFill>
+                <a:latin typeface="Fredoka"/>
+              </a:rPr>
+              <a:t>La falacia ad hominem y el «tú también», con ejemplos</a:t>
+            </a:r>
+          </a:p>
+        </p:txBody>
+      </p:sp>
+      <p:sp>
+        <p:nvSpPr>
+          <p:cNvPr id="4" name="TextBox 3"/>
+          <p:cNvSpPr txBox="1"/>
+          <p:nvPr/>
+        </p:nvSpPr>
+        <p:spPr>
+          <a:xfrm>
+            <a:off x="640000" y="2200000"/>
+            <a:ext cx="10912000" cy="2000000"/>
+          </a:xfrm>
+          <a:prstGeom prst="rect">
+            <a:avLst/>
+          </a:prstGeom>
+          <a:noFill/>
+        </p:spPr>
+        <p:txBody>
+          <a:bodyPr wrap="square">
+            <a:spAutoFit/>
+          </a:bodyPr>
+          <a:lstStyle/>
+          <a:p>
+            <a:pPr>
+              <a:spcAft>
+                <a:spcPts val="1080"/>
+              </a:spcAft>
+            </a:pPr>
+            <a:r>
+              <a:rPr sz="2400" b="0">
+                <a:solidFill>
+                  <a:srgbClr val="C9D3E6"/>
+                </a:solidFill>
+                <a:latin typeface="Nunito Sans"/>
+              </a:rPr>
+              <a:t>Ver más ataques a la persona en discusiones, debates y redes.</a:t>
+            </a:r>
+          </a:p>
+        </p:txBody>
+      </p:sp>
+    </p:spTree>
+  </p:cSld>
+  <p:clrMapOvr>
+    <a:masterClrMapping/>
+  </p:clrMapOvr>
+</p:sld>
+</file>
+
+<file path=ppt/slides/slide19.xml><?xml version="1.0" encoding="utf-8"?>
+<p:sld xmlns:a="http://schemas.openxmlformats.org/drawingml/2006/main" xmlns:p="http://schemas.openxmlformats.org/presentationml/2006/main" xmlns:r="http://schemas.openxmlformats.org/officeDocument/2006/relationships">
+  <p:cSld>
+    <p:bg>
+      <p:bgPr>
+        <a:solidFill>
+          <a:srgbClr val="1F2A44"/>
+        </a:solidFill>
+        <a:effectLst/>
+      </p:bgPr>
+    </p:bg>
+    <p:spTree>
+      <p:nvGrpSpPr>
+        <p:cNvPr id="1" name=""/>
+        <p:cNvGrpSpPr/>
+        <p:nvPr/>
+      </p:nvGrpSpPr>
+      <p:grpSpPr/>
+      <p:sp>
+        <p:nvSpPr>
+          <p:cNvPr id="2" name="TextBox 1"/>
+          <p:cNvSpPr txBox="1"/>
+          <p:nvPr/>
+        </p:nvSpPr>
+        <p:spPr>
+          <a:xfrm>
+            <a:off x="640000" y="380000"/>
+            <a:ext cx="10912000" cy="420000"/>
+          </a:xfrm>
+          <a:prstGeom prst="rect">
+            <a:avLst/>
+          </a:prstGeom>
+          <a:noFill/>
+        </p:spPr>
+        <p:txBody>
+          <a:bodyPr wrap="square">
+            <a:spAutoFit/>
+          </a:bodyPr>
+          <a:lstStyle/>
+          <a:p>
+            <a:pPr>
+              <a:spcAft>
+                <a:spcPts val="630"/>
+              </a:spcAft>
+            </a:pPr>
+            <a:r>
+              <a:rPr sz="1400" b="1">
+                <a:solidFill>
+                  <a:srgbClr val="F4B183"/>
+                </a:solidFill>
+                <a:latin typeface="Nunito Sans"/>
+              </a:rPr>
               <a:t>AHORA, LA HOJA DEL DÍA</a:t>
             </a:r>
           </a:p>
@@ -6241,7 +6569,7 @@
                 </a:solidFill>
                 <a:latin typeface="Nunito Sans"/>
               </a:rPr>
-              <a:t>Cuántos casos hacen falta para generalizar depende de lo ______ que sean las cosas.  (sesión 19)</a:t>
+              <a:t>Las tres preguntas de una buena razón: ¿es verdad?, ¿viene a ______?, ¿es ______?  (sesión 19)</a:t>
             </a:r>
           </a:p>
           <a:p>
@@ -6266,7 +6594,7 @@
                 </a:solidFill>
                 <a:latin typeface="Nunito Sans"/>
               </a:rPr>
-              <a:t>En la generalización apresurada falla esta pregunta de una buena razón: ¿es ______?  (sesión 19)</a:t>
+              <a:t>Las falacias de la unidad 4 atacan, ______ o emocionan.  (sesión 19)</a:t>
             </a:r>
           </a:p>
           <a:p>
@@ -6291,7 +6619,7 @@
                 </a:solidFill>
                 <a:latin typeface="Nunito Sans"/>
               </a:rPr>
-              <a:t>Tres formas de fabricar el muñeco: exagerar, ______ e inventar.  (sesión 15)</a:t>
+              <a:t>Si la razón es ______, el argumento se cae.  (sesión 15)</a:t>
             </a:r>
           </a:p>
         </p:txBody>
@@ -6443,7 +6771,7 @@
                 </a:solidFill>
                 <a:latin typeface="Nunito Sans"/>
               </a:rPr>
-              <a:t>Cuántos casos hacen falta para generalizar depende de lo </a:t>
+              <a:t>Las tres preguntas de una buena razón: ¿es verdad?, ¿viene a </a:t>
             </a:r>
             <a:r>
               <a:rPr sz="2600" b="1">
@@ -6452,7 +6780,7 @@
                 </a:solidFill>
                 <a:latin typeface="Nunito Sans"/>
               </a:rPr>
-              <a:t>variadas</a:t>
+              <a:t>cuento</a:t>
             </a:r>
             <a:r>
               <a:rPr sz="2600" b="0">
@@ -6461,7 +6789,25 @@
                 </a:solidFill>
                 <a:latin typeface="Nunito Sans"/>
               </a:rPr>
-              <a:t> que sean las cosas.  (sesión 19)</a:t>
+              <a:t>?, ¿es </a:t>
+            </a:r>
+            <a:r>
+              <a:rPr sz="2600" b="1">
+                <a:solidFill>
+                  <a:srgbClr val="1F2A44"/>
+                </a:solidFill>
+                <a:latin typeface="Nunito Sans"/>
+              </a:rPr>
+              <a:t>suficiente</a:t>
+            </a:r>
+            <a:r>
+              <a:rPr sz="2600" b="0">
+                <a:solidFill>
+                  <a:srgbClr val="1F2A44"/>
+                </a:solidFill>
+                <a:latin typeface="Nunito Sans"/>
+              </a:rPr>
+              <a:t>?  (sesión 19)</a:t>
             </a:r>
           </a:p>
           <a:p>
@@ -6486,7 +6832,7 @@
                 </a:solidFill>
                 <a:latin typeface="Nunito Sans"/>
               </a:rPr>
-              <a:t>En la generalización apresurada falla esta pregunta de una buena razón: ¿es </a:t>
+              <a:t>Las falacias de la unidad 4 atacan, </a:t>
             </a:r>
             <a:r>
               <a:rPr sz="2600" b="1">
@@ -6495,7 +6841,7 @@
                 </a:solidFill>
                 <a:latin typeface="Nunito Sans"/>
               </a:rPr>
-              <a:t>suficiente</a:t>
+              <a:t>desvían</a:t>
             </a:r>
             <a:r>
               <a:rPr sz="2600" b="0">
@@ -6504,7 +6850,7 @@
                 </a:solidFill>
                 <a:latin typeface="Nunito Sans"/>
               </a:rPr>
-              <a:t>?  (sesión 19)</a:t>
+              <a:t> o emocionan.  (sesión 19)</a:t>
             </a:r>
           </a:p>
           <a:p>
@@ -6529,7 +6875,7 @@
                 </a:solidFill>
                 <a:latin typeface="Nunito Sans"/>
               </a:rPr>
-              <a:t>Tres formas de fabricar el muñeco: exagerar, </a:t>
+              <a:t>Si la razón es </a:t>
             </a:r>
             <a:r>
               <a:rPr sz="2600" b="1">
@@ -6538,7 +6884,7 @@
                 </a:solidFill>
                 <a:latin typeface="Nunito Sans"/>
               </a:rPr>
-              <a:t>recortar</a:t>
+              <a:t>falsa</a:t>
             </a:r>
             <a:r>
               <a:rPr sz="2600" b="0">
@@ -6547,7 +6893,7 @@
                 </a:solidFill>
                 <a:latin typeface="Nunito Sans"/>
               </a:rPr>
-              <a:t> e inventar.  (sesión 15)</a:t>
+              <a:t>, el argumento se cae.  (sesión 15)</a:t>
             </a:r>
           </a:p>
         </p:txBody>
@@ -6694,7 +7040,7 @@
                 </a:solidFill>
                 <a:latin typeface="Nunito Sans"/>
               </a:rPr>
-              <a:t>Mensaje que recibe una chica de su cuadrilla: «O vienes a Aste Nagusia toda la noche, o es que ya no eres de las nuestras».</a:t>
+              <a:t>Una chica propone alargar el recreo cinco minutos. Un chico contesta: «Tú qué vas a proponer, si eres nueva y no sabes ni dónde está el gimnasio».</a:t>
             </a:r>
           </a:p>
         </p:txBody>
@@ -6733,7 +7079,7 @@
                 </a:solidFill>
                 <a:latin typeface="Nunito Sans"/>
               </a:rPr>
-              <a:t>¿De verdad solo hay esas dos opciones?</a:t>
+              <a:t>¿Ha dicho ese chico algo sobre si la idea de la chica es buena?</a:t>
             </a:r>
           </a:p>
         </p:txBody>
@@ -6837,7 +7183,7 @@
                 </a:solidFill>
                 <a:latin typeface="Fredoka"/>
               </a:rPr>
-              <a:t>«O esto o aquello»</a:t>
+              <a:t>Atacar a la persona</a:t>
             </a:r>
           </a:p>
         </p:txBody>
@@ -6902,7 +7248,7 @@
                 </a:solidFill>
                 <a:latin typeface="Nunito Sans"/>
               </a:rPr>
-              <a:t>BLOQUE 1 · «O ESTO O AQUELLO»</a:t>
+              <a:t>BLOQUE 1 · ATACAR A LA PERSONA</a:t>
             </a:r>
           </a:p>
         </p:txBody>
@@ -6941,7 +7287,7 @@
                 </a:solidFill>
                 <a:latin typeface="Fredoka"/>
               </a:rPr>
-              <a:t>Falso dilema</a:t>
+              <a:t>Ataque a la persona (ad hominem)</a:t>
             </a:r>
           </a:p>
         </p:txBody>
@@ -7023,7 +7369,7 @@
                 </a:solidFill>
                 <a:latin typeface="Nunito Sans"/>
               </a:rPr>
-              <a:t>Presentar solo dos opciones, como si no hubiera más, cuando en realidad hay otras salidas.</a:t>
+              <a:t>Atacar a quien da un argumento en lugar de responder a su argumento.</a:t>
             </a:r>
           </a:p>
         </p:txBody>
@@ -7065,13 +7411,22 @@
               <a:t>• </a:t>
             </a:r>
             <a:r>
+              <a:rPr sz="2800" b="0">
+                <a:solidFill>
+                  <a:srgbClr val="1F2A44"/>
+                </a:solidFill>
+                <a:latin typeface="Nunito Sans"/>
+              </a:rPr>
+              <a:t>En latín, </a:t>
+            </a:r>
+            <a:r>
               <a:rPr sz="2800" b="1">
                 <a:solidFill>
                   <a:srgbClr val="1F2A44"/>
                 </a:solidFill>
                 <a:latin typeface="Nunito Sans"/>
               </a:rPr>
-              <a:t>Dilema</a:t>
+              <a:t>ad hominem</a:t>
             </a:r>
             <a:r>
               <a:rPr sz="2800" b="0">
@@ -7080,7 +7435,7 @@
                 </a:solidFill>
                 <a:latin typeface="Nunito Sans"/>
               </a:rPr>
-              <a:t>: tener que elegir entre dos opciones</a:t>
+              <a:t> significa «contra la persona»</a:t>
             </a:r>
           </a:p>
           <a:p>
@@ -7105,7 +7460,7 @@
                 </a:solidFill>
                 <a:latin typeface="Nunito Sans"/>
               </a:rPr>
-              <a:t>Suele sonar así: «o… o…»</a:t>
+              <a:t>Ataca su aspecto, sus notas, su edad, su familia…</a:t>
             </a:r>
           </a:p>
           <a:p>
@@ -7130,7 +7485,16 @@
                 </a:solidFill>
                 <a:latin typeface="Nunito Sans"/>
               </a:rPr>
-              <a:t>Suele empujarte hacia la opción que quiere el otro</a:t>
+              <a:t>La idea se queda </a:t>
+            </a:r>
+            <a:r>
+              <a:rPr sz="2800" b="1">
+                <a:solidFill>
+                  <a:srgbClr val="1F2A44"/>
+                </a:solidFill>
+                <a:latin typeface="Nunito Sans"/>
+              </a:rPr>
+              <a:t>sin responder</a:t>
             </a:r>
           </a:p>
           <a:p>
@@ -7164,7 +7528,7 @@
                 </a:solidFill>
                 <a:latin typeface="Nunito Sans"/>
               </a:rPr>
-              <a:t>¿seguro que no hay una tercera opción?</a:t>
+              <a:t>¿qué tiene que ver quién lo dice con la idea?</a:t>
             </a:r>
           </a:p>
         </p:txBody>
@@ -7229,7 +7593,7 @@
                 </a:solidFill>
                 <a:latin typeface="Nunito Sans"/>
               </a:rPr>
-              <a:t>BLOQUE 1 · «O ESTO O AQUELLO»</a:t>
+              <a:t>BLOQUE 1 · ATACAR A LA PERSONA</a:t>
             </a:r>
           </a:p>
         </p:txBody>
@@ -7268,21 +7632,103 @@
                 </a:solidFill>
                 <a:latin typeface="Fredoka"/>
               </a:rPr>
-              <a:t>Dónde se esconden las otras opciones</a:t>
-            </a:r>
-          </a:p>
-        </p:txBody>
-      </p:sp>
-      <p:sp>
-        <p:nvSpPr>
-          <p:cNvPr id="4" name="TextBox 3"/>
+              <a:t>«Tú también» (tu quoque)</a:t>
+            </a:r>
+          </a:p>
+        </p:txBody>
+      </p:sp>
+      <p:sp>
+        <p:nvSpPr>
+          <p:cNvPr id="4" name="Rectangle 3"/>
+          <p:cNvSpPr/>
+          <p:nvPr/>
+        </p:nvSpPr>
+        <p:spPr>
+          <a:xfrm>
+            <a:off x="640000" y="1650000"/>
+            <a:ext cx="10912000" cy="1150000"/>
+          </a:xfrm>
+          <a:prstGeom prst="rect">
+            <a:avLst/>
+          </a:prstGeom>
+          <a:solidFill>
+            <a:srgbClr val="EAF0F7"/>
+          </a:solidFill>
+          <a:ln>
+            <a:noFill/>
+          </a:ln>
+        </p:spPr>
+        <p:style>
+          <a:lnRef idx="1">
+            <a:schemeClr val="accent1"/>
+          </a:lnRef>
+          <a:fillRef idx="3">
+            <a:schemeClr val="accent1"/>
+          </a:fillRef>
+          <a:effectRef idx="2">
+            <a:schemeClr val="accent1"/>
+          </a:effectRef>
+          <a:fontRef idx="minor">
+            <a:schemeClr val="lt1"/>
+          </a:fontRef>
+        </p:style>
+        <p:txBody>
+          <a:bodyPr rtlCol="0" anchor="ctr"/>
+          <a:lstStyle/>
+          <a:p>
+            <a:pPr algn="ctr"/>
+          </a:p>
+        </p:txBody>
+      </p:sp>
+      <p:sp>
+        <p:nvSpPr>
+          <p:cNvPr id="5" name="TextBox 4"/>
           <p:cNvSpPr txBox="1"/>
           <p:nvPr/>
         </p:nvSpPr>
         <p:spPr>
           <a:xfrm>
-            <a:off x="640000" y="1650000"/>
-            <a:ext cx="10912000" cy="4808000"/>
+            <a:off x="840000" y="1730000"/>
+            <a:ext cx="10512000" cy="1000000"/>
+          </a:xfrm>
+          <a:prstGeom prst="rect">
+            <a:avLst/>
+          </a:prstGeom>
+          <a:noFill/>
+        </p:spPr>
+        <p:txBody>
+          <a:bodyPr wrap="square" anchor="ctr">
+            <a:spAutoFit/>
+          </a:bodyPr>
+          <a:lstStyle/>
+          <a:p>
+            <a:pPr>
+              <a:spcAft>
+                <a:spcPts val="1260"/>
+              </a:spcAft>
+            </a:pPr>
+            <a:r>
+              <a:rPr sz="2800" b="1">
+                <a:solidFill>
+                  <a:srgbClr val="1F2A44"/>
+                </a:solidFill>
+                <a:latin typeface="Nunito Sans"/>
+              </a:rPr>
+              <a:t>Rechazar una crítica o un consejo porque quien lo da tampoco lo cumple.</a:t>
+            </a:r>
+          </a:p>
+        </p:txBody>
+      </p:sp>
+      <p:sp>
+        <p:nvSpPr>
+          <p:cNvPr id="6" name="TextBox 5"/>
+          <p:cNvSpPr txBox="1"/>
+          <p:nvPr/>
+        </p:nvSpPr>
+        <p:spPr>
+          <a:xfrm>
+            <a:off x="640000" y="3000000"/>
+            <a:ext cx="10912000" cy="3458000"/>
           </a:xfrm>
           <a:prstGeom prst="rect">
             <a:avLst/>
@@ -7310,13 +7756,22 @@
               <a:t>• </a:t>
             </a:r>
             <a:r>
+              <a:rPr sz="2800" b="0">
+                <a:solidFill>
+                  <a:srgbClr val="1F2A44"/>
+                </a:solidFill>
+                <a:latin typeface="Nunito Sans"/>
+              </a:rPr>
+              <a:t>En latín, </a:t>
+            </a:r>
+            <a:r>
               <a:rPr sz="2800" b="1">
                 <a:solidFill>
                   <a:srgbClr val="1F2A44"/>
                 </a:solidFill>
                 <a:latin typeface="Nunito Sans"/>
               </a:rPr>
-              <a:t>En medio:</a:t>
+              <a:t>tu quoque</a:t>
             </a:r>
             <a:r>
               <a:rPr sz="2800" b="0">
@@ -7325,7 +7780,7 @@
                 </a:solidFill>
                 <a:latin typeface="Nunito Sans"/>
               </a:rPr>
-              <a:t> ni todo ni nada, un poco</a:t>
+              <a:t> significa «tú también»</a:t>
             </a:r>
           </a:p>
           <a:p>
@@ -7344,90 +7799,38 @@
               <a:t>• </a:t>
             </a:r>
             <a:r>
+              <a:rPr sz="2800" b="0">
+                <a:solidFill>
+                  <a:srgbClr val="1F2A44"/>
+                </a:solidFill>
+                <a:latin typeface="Nunito Sans"/>
+              </a:rPr>
+              <a:t>Es un tipo de ataque a la persona</a:t>
+            </a:r>
+          </a:p>
+          <a:p>
+            <a:pPr>
+              <a:spcAft>
+                <a:spcPts val="1260"/>
+              </a:spcAft>
+            </a:pPr>
+            <a:r>
               <a:rPr sz="2800" b="1">
                 <a:solidFill>
+                  <a:srgbClr val="E8793A"/>
+                </a:solidFill>
+                <a:latin typeface="Nunito Sans"/>
+              </a:rPr>
+              <a:t>• </a:t>
+            </a:r>
+            <a:r>
+              <a:rPr sz="2800" b="0">
+                <a:solidFill>
                   <a:srgbClr val="1F2A44"/>
                 </a:solidFill>
                 <a:latin typeface="Nunito Sans"/>
               </a:rPr>
-              <a:t>Las dos a la vez:</a:t>
-            </a:r>
-            <a:r>
-              <a:rPr sz="2800" b="0">
-                <a:solidFill>
-                  <a:srgbClr val="1F2A44"/>
-                </a:solidFill>
-                <a:latin typeface="Nunito Sans"/>
-              </a:rPr>
-              <a:t> estudiar y también jugar</a:t>
-            </a:r>
-          </a:p>
-          <a:p>
-            <a:pPr>
-              <a:spcAft>
-                <a:spcPts val="1260"/>
-              </a:spcAft>
-            </a:pPr>
-            <a:r>
-              <a:rPr sz="2800" b="1">
-                <a:solidFill>
-                  <a:srgbClr val="E8793A"/>
-                </a:solidFill>
-                <a:latin typeface="Nunito Sans"/>
-              </a:rPr>
-              <a:t>• </a:t>
-            </a:r>
-            <a:r>
-              <a:rPr sz="2800" b="1">
-                <a:solidFill>
-                  <a:srgbClr val="1F2A44"/>
-                </a:solidFill>
-                <a:latin typeface="Nunito Sans"/>
-              </a:rPr>
-              <a:t>Ninguna de las dos:</a:t>
-            </a:r>
-            <a:r>
-              <a:rPr sz="2800" b="0">
-                <a:solidFill>
-                  <a:srgbClr val="1F2A44"/>
-                </a:solidFill>
-                <a:latin typeface="Nunito Sans"/>
-              </a:rPr>
-              <a:t> otra cosa distinta</a:t>
-            </a:r>
-          </a:p>
-          <a:p>
-            <a:pPr>
-              <a:spcAft>
-                <a:spcPts val="1260"/>
-              </a:spcAft>
-            </a:pPr>
-            <a:r>
-              <a:rPr sz="2800" b="1">
-                <a:solidFill>
-                  <a:srgbClr val="E8793A"/>
-                </a:solidFill>
-                <a:latin typeface="Nunito Sans"/>
-              </a:rPr>
-              <a:t>• </a:t>
-            </a:r>
-            <a:r>
-              <a:rPr sz="2800" b="1">
-                <a:solidFill>
-                  <a:srgbClr val="1F2A44"/>
-                </a:solidFill>
-                <a:latin typeface="Nunito Sans"/>
-              </a:rPr>
-              <a:t>Más tarde:</a:t>
-            </a:r>
-            <a:r>
-              <a:rPr sz="2800" b="0">
-                <a:solidFill>
-                  <a:srgbClr val="1F2A44"/>
-                </a:solidFill>
-                <a:latin typeface="Nunito Sans"/>
-              </a:rPr>
-              <a:t> hoy no, otro día sí</a:t>
+              <a:t>Que alguien no cumpla un consejo no lo hace falso</a:t>
             </a:r>
           </a:p>
         </p:txBody>
@@ -7441,6 +7844,320 @@
 </file>
 
 <file path=ppt/slides/slide8.xml><?xml version="1.0" encoding="utf-8"?>
+<p:sld xmlns:a="http://schemas.openxmlformats.org/drawingml/2006/main" xmlns:p="http://schemas.openxmlformats.org/presentationml/2006/main" xmlns:r="http://schemas.openxmlformats.org/officeDocument/2006/relationships">
+  <p:cSld>
+    <p:bg>
+      <p:bgPr>
+        <a:solidFill>
+          <a:srgbClr val="FBF7EF"/>
+        </a:solidFill>
+        <a:effectLst/>
+      </p:bgPr>
+    </p:bg>
+    <p:spTree>
+      <p:nvGrpSpPr>
+        <p:cNvPr id="1" name=""/>
+        <p:cNvGrpSpPr/>
+        <p:nvPr/>
+      </p:nvGrpSpPr>
+      <p:grpSpPr/>
+      <p:sp>
+        <p:nvSpPr>
+          <p:cNvPr id="2" name="TextBox 1"/>
+          <p:cNvSpPr txBox="1"/>
+          <p:nvPr/>
+        </p:nvSpPr>
+        <p:spPr>
+          <a:xfrm>
+            <a:off x="640000" y="380000"/>
+            <a:ext cx="10912000" cy="420000"/>
+          </a:xfrm>
+          <a:prstGeom prst="rect">
+            <a:avLst/>
+          </a:prstGeom>
+          <a:noFill/>
+        </p:spPr>
+        <p:txBody>
+          <a:bodyPr wrap="square">
+            <a:spAutoFit/>
+          </a:bodyPr>
+          <a:lstStyle/>
+          <a:p>
+            <a:pPr>
+              <a:spcAft>
+                <a:spcPts val="630"/>
+              </a:spcAft>
+            </a:pPr>
+            <a:r>
+              <a:rPr sz="1400" b="1">
+                <a:solidFill>
+                  <a:srgbClr val="E8793A"/>
+                </a:solidFill>
+                <a:latin typeface="Nunito Sans"/>
+              </a:rPr>
+              <a:t>BLOQUE 1 · ATACAR A LA PERSONA</a:t>
+            </a:r>
+          </a:p>
+        </p:txBody>
+      </p:sp>
+      <p:sp>
+        <p:nvSpPr>
+          <p:cNvPr id="3" name="TextBox 2"/>
+          <p:cNvSpPr txBox="1"/>
+          <p:nvPr/>
+        </p:nvSpPr>
+        <p:spPr>
+          <a:xfrm>
+            <a:off x="640000" y="760000"/>
+            <a:ext cx="10912000" cy="800000"/>
+          </a:xfrm>
+          <a:prstGeom prst="rect">
+            <a:avLst/>
+          </a:prstGeom>
+          <a:noFill/>
+        </p:spPr>
+        <p:txBody>
+          <a:bodyPr wrap="square">
+            <a:spAutoFit/>
+          </a:bodyPr>
+          <a:lstStyle/>
+          <a:p>
+            <a:pPr>
+              <a:spcAft>
+                <a:spcPts val="1710"/>
+              </a:spcAft>
+            </a:pPr>
+            <a:r>
+              <a:rPr sz="3800" b="1">
+                <a:solidFill>
+                  <a:srgbClr val="1F2A44"/>
+                </a:solidFill>
+                <a:latin typeface="Fredoka"/>
+              </a:rPr>
+              <a:t>Cómo reconocerlo</a:t>
+            </a:r>
+          </a:p>
+        </p:txBody>
+      </p:sp>
+      <p:graphicFrame>
+        <p:nvGraphicFramePr>
+          <p:cNvPr id="4" name="Table 3"/>
+          <p:cNvGraphicFramePr>
+            <a:graphicFrameLocks noGrp="1"/>
+          </p:cNvGraphicFramePr>
+          <p:nvPr/>
+        </p:nvGraphicFramePr>
+        <p:xfrm>
+          <a:off x="640000" y="1700000"/>
+          <a:ext cx="10912000" cy="2400000"/>
+        </p:xfrm>
+        <a:graphic>
+          <a:graphicData uri="http://schemas.openxmlformats.org/drawingml/2006/table">
+            <a:tbl>
+              <a:tblPr firstRow="1" bandRow="1">
+                <a:tableStyleId>{5C22544A-7EE6-4342-B048-85BDC9FD1C3A}</a:tableStyleId>
+              </a:tblPr>
+              <a:tblGrid>
+                <a:gridCol w="5456000"/>
+                <a:gridCol w="5456000"/>
+              </a:tblGrid>
+              <a:tr h="600000">
+                <a:tc>
+                  <a:txBody>
+                    <a:bodyPr/>
+                    <a:lstStyle/>
+                    <a:p>
+                      <a:r>
+                        <a:rPr sz="2000" b="1">
+                          <a:solidFill>
+                            <a:srgbClr val="FBF7EF"/>
+                          </a:solidFill>
+                          <a:latin typeface="Fredoka"/>
+                        </a:rPr>
+                        <a:t>Señal</a:t>
+                      </a:r>
+                    </a:p>
+                  </a:txBody>
+                  <a:tcPr>
+                    <a:solidFill>
+                      <a:srgbClr val="1F2A44"/>
+                    </a:solidFill>
+                  </a:tcPr>
+                </a:tc>
+                <a:tc>
+                  <a:txBody>
+                    <a:bodyPr/>
+                    <a:lstStyle/>
+                    <a:p>
+                      <a:r>
+                        <a:rPr sz="2000" b="1">
+                          <a:solidFill>
+                            <a:srgbClr val="FBF7EF"/>
+                          </a:solidFill>
+                          <a:latin typeface="Fredoka"/>
+                        </a:rPr>
+                        <a:t>Ejemplo</a:t>
+                      </a:r>
+                    </a:p>
+                  </a:txBody>
+                  <a:tcPr>
+                    <a:solidFill>
+                      <a:srgbClr val="1F2A44"/>
+                    </a:solidFill>
+                  </a:tcPr>
+                </a:tc>
+              </a:tr>
+              <a:tr h="600000">
+                <a:tc>
+                  <a:txBody>
+                    <a:bodyPr/>
+                    <a:lstStyle/>
+                    <a:p>
+                      <a:r>
+                        <a:rPr sz="2000" b="0">
+                          <a:solidFill>
+                            <a:srgbClr val="1F2A44"/>
+                          </a:solidFill>
+                          <a:latin typeface="Nunito Sans"/>
+                        </a:rPr>
+                        <a:t>Habla de la persona, no de la idea</a:t>
+                      </a:r>
+                    </a:p>
+                  </a:txBody>
+                  <a:tcPr>
+                    <a:solidFill>
+                      <a:srgbClr val="FFFFFF"/>
+                    </a:solidFill>
+                  </a:tcPr>
+                </a:tc>
+                <a:tc>
+                  <a:txBody>
+                    <a:bodyPr/>
+                    <a:lstStyle/>
+                    <a:p>
+                      <a:r>
+                        <a:rPr sz="2000" b="0">
+                          <a:solidFill>
+                            <a:srgbClr val="1F2A44"/>
+                          </a:solidFill>
+                          <a:latin typeface="Nunito Sans"/>
+                        </a:rPr>
+                        <a:t>«¿Tú? Si suspendiste Matemáticas.»</a:t>
+                      </a:r>
+                    </a:p>
+                  </a:txBody>
+                  <a:tcPr>
+                    <a:solidFill>
+                      <a:srgbClr val="FFFFFF"/>
+                    </a:solidFill>
+                  </a:tcPr>
+                </a:tc>
+              </a:tr>
+              <a:tr h="600000">
+                <a:tc>
+                  <a:txBody>
+                    <a:bodyPr/>
+                    <a:lstStyle/>
+                    <a:p>
+                      <a:r>
+                        <a:rPr sz="2000" b="0">
+                          <a:solidFill>
+                            <a:srgbClr val="1F2A44"/>
+                          </a:solidFill>
+                          <a:latin typeface="Nunito Sans"/>
+                        </a:rPr>
+                        <a:t>Usa su edad, su grupo o su aspecto</a:t>
+                      </a:r>
+                    </a:p>
+                  </a:txBody>
+                  <a:tcPr>
+                    <a:solidFill>
+                      <a:srgbClr val="EAF0F7"/>
+                    </a:solidFill>
+                  </a:tcPr>
+                </a:tc>
+                <a:tc>
+                  <a:txBody>
+                    <a:bodyPr/>
+                    <a:lstStyle/>
+                    <a:p>
+                      <a:r>
+                        <a:rPr sz="2000" b="0">
+                          <a:solidFill>
+                            <a:srgbClr val="1F2A44"/>
+                          </a:solidFill>
+                          <a:latin typeface="Nunito Sans"/>
+                        </a:rPr>
+                        <a:t>«Eres un crío, qué sabrás.»</a:t>
+                      </a:r>
+                    </a:p>
+                  </a:txBody>
+                  <a:tcPr>
+                    <a:solidFill>
+                      <a:srgbClr val="EAF0F7"/>
+                    </a:solidFill>
+                  </a:tcPr>
+                </a:tc>
+              </a:tr>
+              <a:tr h="600000">
+                <a:tc>
+                  <a:txBody>
+                    <a:bodyPr/>
+                    <a:lstStyle/>
+                    <a:p>
+                      <a:r>
+                        <a:rPr sz="2000" b="0">
+                          <a:solidFill>
+                            <a:srgbClr val="1F2A44"/>
+                          </a:solidFill>
+                          <a:latin typeface="Nunito Sans"/>
+                        </a:rPr>
+                        <a:t>Le devuelve la crítica</a:t>
+                      </a:r>
+                    </a:p>
+                  </a:txBody>
+                  <a:tcPr>
+                    <a:solidFill>
+                      <a:srgbClr val="FFFFFF"/>
+                    </a:solidFill>
+                  </a:tcPr>
+                </a:tc>
+                <a:tc>
+                  <a:txBody>
+                    <a:bodyPr/>
+                    <a:lstStyle/>
+                    <a:p>
+                      <a:r>
+                        <a:rPr sz="2000" b="0">
+                          <a:solidFill>
+                            <a:srgbClr val="1F2A44"/>
+                          </a:solidFill>
+                          <a:latin typeface="Nunito Sans"/>
+                        </a:rPr>
+                        <a:t>«Pues tú también lo haces.»</a:t>
+                      </a:r>
+                    </a:p>
+                  </a:txBody>
+                  <a:tcPr>
+                    <a:solidFill>
+                      <a:srgbClr val="FFFFFF"/>
+                    </a:solidFill>
+                  </a:tcPr>
+                </a:tc>
+              </a:tr>
+            </a:tbl>
+          </a:graphicData>
+        </a:graphic>
+      </p:graphicFrame>
+    </p:spTree>
+  </p:cSld>
+  <p:clrMapOvr>
+    <a:masterClrMapping/>
+  </p:clrMapOvr>
+</p:sld>
+</file>
+
+<file path=ppt/slides/slide9.xml><?xml version="1.0" encoding="utf-8"?>
 <p:sld xmlns:a="http://schemas.openxmlformats.org/drawingml/2006/main" xmlns:p="http://schemas.openxmlformats.org/presentationml/2006/main" xmlns:r="http://schemas.openxmlformats.org/officeDocument/2006/relationships">
   <p:cSld>
     <p:bg>
@@ -7532,315 +8249,6 @@
                 <a:latin typeface="Fredoka"/>
               </a:rPr>
               <a:t>Casos resueltos</a:t>
-            </a:r>
-          </a:p>
-        </p:txBody>
-      </p:sp>
-    </p:spTree>
-  </p:cSld>
-  <p:clrMapOvr>
-    <a:masterClrMapping/>
-  </p:clrMapOvr>
-</p:sld>
-</file>
-
-<file path=ppt/slides/slide9.xml><?xml version="1.0" encoding="utf-8"?>
-<p:sld xmlns:a="http://schemas.openxmlformats.org/drawingml/2006/main" xmlns:p="http://schemas.openxmlformats.org/presentationml/2006/main" xmlns:r="http://schemas.openxmlformats.org/officeDocument/2006/relationships">
-  <p:cSld>
-    <p:bg>
-      <p:bgPr>
-        <a:solidFill>
-          <a:srgbClr val="FBF7EF"/>
-        </a:solidFill>
-        <a:effectLst/>
-      </p:bgPr>
-    </p:bg>
-    <p:spTree>
-      <p:nvGrpSpPr>
-        <p:cNvPr id="1" name=""/>
-        <p:cNvGrpSpPr/>
-        <p:nvPr/>
-      </p:nvGrpSpPr>
-      <p:grpSpPr/>
-      <p:sp>
-        <p:nvSpPr>
-          <p:cNvPr id="2" name="TextBox 1"/>
-          <p:cNvSpPr txBox="1"/>
-          <p:nvPr/>
-        </p:nvSpPr>
-        <p:spPr>
-          <a:xfrm>
-            <a:off x="640000" y="380000"/>
-            <a:ext cx="10912000" cy="420000"/>
-          </a:xfrm>
-          <a:prstGeom prst="rect">
-            <a:avLst/>
-          </a:prstGeom>
-          <a:noFill/>
-        </p:spPr>
-        <p:txBody>
-          <a:bodyPr wrap="square">
-            <a:spAutoFit/>
-          </a:bodyPr>
-          <a:lstStyle/>
-          <a:p>
-            <a:pPr>
-              <a:spcAft>
-                <a:spcPts val="630"/>
-              </a:spcAft>
-            </a:pPr>
-            <a:r>
-              <a:rPr sz="1400" b="1">
-                <a:solidFill>
-                  <a:srgbClr val="E8793A"/>
-                </a:solidFill>
-                <a:latin typeface="Nunito Sans"/>
-              </a:rPr>
-              <a:t>BLOQUE 2 · CASOS RESUELTOS</a:t>
-            </a:r>
-          </a:p>
-        </p:txBody>
-      </p:sp>
-      <p:sp>
-        <p:nvSpPr>
-          <p:cNvPr id="3" name="TextBox 2"/>
-          <p:cNvSpPr txBox="1"/>
-          <p:nvPr/>
-        </p:nvSpPr>
-        <p:spPr>
-          <a:xfrm>
-            <a:off x="640000" y="760000"/>
-            <a:ext cx="10912000" cy="800000"/>
-          </a:xfrm>
-          <a:prstGeom prst="rect">
-            <a:avLst/>
-          </a:prstGeom>
-          <a:noFill/>
-        </p:spPr>
-        <p:txBody>
-          <a:bodyPr wrap="square">
-            <a:spAutoFit/>
-          </a:bodyPr>
-          <a:lstStyle/>
-          <a:p>
-            <a:pPr>
-              <a:spcAft>
-                <a:spcPts val="1710"/>
-              </a:spcAft>
-            </a:pPr>
-            <a:r>
-              <a:rPr sz="3800" b="1">
-                <a:solidFill>
-                  <a:srgbClr val="1F2A44"/>
-                </a:solidFill>
-                <a:latin typeface="Fredoka"/>
-              </a:rPr>
-              <a:t>Caso 1 · Aste Nagusia</a:t>
-            </a:r>
-          </a:p>
-        </p:txBody>
-      </p:sp>
-      <p:sp>
-        <p:nvSpPr>
-          <p:cNvPr id="4" name="Rectangle 3"/>
-          <p:cNvSpPr/>
-          <p:nvPr/>
-        </p:nvSpPr>
-        <p:spPr>
-          <a:xfrm>
-            <a:off x="640000" y="1600000"/>
-            <a:ext cx="10912000" cy="1100000"/>
-          </a:xfrm>
-          <a:prstGeom prst="rect">
-            <a:avLst/>
-          </a:prstGeom>
-          <a:solidFill>
-            <a:srgbClr val="FFFFFF"/>
-          </a:solidFill>
-          <a:ln>
-            <a:noFill/>
-          </a:ln>
-        </p:spPr>
-        <p:style>
-          <a:lnRef idx="1">
-            <a:schemeClr val="accent1"/>
-          </a:lnRef>
-          <a:fillRef idx="3">
-            <a:schemeClr val="accent1"/>
-          </a:fillRef>
-          <a:effectRef idx="2">
-            <a:schemeClr val="accent1"/>
-          </a:effectRef>
-          <a:fontRef idx="minor">
-            <a:schemeClr val="lt1"/>
-          </a:fontRef>
-        </p:style>
-        <p:txBody>
-          <a:bodyPr rtlCol="0" anchor="ctr"/>
-          <a:lstStyle/>
-          <a:p>
-            <a:pPr algn="ctr"/>
-          </a:p>
-        </p:txBody>
-      </p:sp>
-      <p:sp>
-        <p:nvSpPr>
-          <p:cNvPr id="5" name="TextBox 4"/>
-          <p:cNvSpPr txBox="1"/>
-          <p:nvPr/>
-        </p:nvSpPr>
-        <p:spPr>
-          <a:xfrm>
-            <a:off x="840000" y="1650000"/>
-            <a:ext cx="10512000" cy="1000000"/>
-          </a:xfrm>
-          <a:prstGeom prst="rect">
-            <a:avLst/>
-          </a:prstGeom>
-          <a:noFill/>
-        </p:spPr>
-        <p:txBody>
-          <a:bodyPr wrap="square" anchor="ctr">
-            <a:spAutoFit/>
-          </a:bodyPr>
-          <a:lstStyle/>
-          <a:p>
-            <a:pPr>
-              <a:spcAft>
-                <a:spcPts val="1170"/>
-              </a:spcAft>
-            </a:pPr>
-            <a:r>
-              <a:rPr sz="2600" b="1">
-                <a:solidFill>
-                  <a:srgbClr val="1F2A44"/>
-                </a:solidFill>
-                <a:latin typeface="Nunito Sans"/>
-              </a:rPr>
-              <a:t>Mensaje que recibe una chica de su cuadrilla: «O vienes a Aste Nagusia toda la noche, o es que ya no eres de las nuestras».</a:t>
-            </a:r>
-          </a:p>
-        </p:txBody>
-      </p:sp>
-      <p:sp>
-        <p:nvSpPr>
-          <p:cNvPr id="6" name="TextBox 5"/>
-          <p:cNvSpPr txBox="1"/>
-          <p:nvPr/>
-        </p:nvSpPr>
-        <p:spPr>
-          <a:xfrm>
-            <a:off x="640000" y="2900000"/>
-            <a:ext cx="10912000" cy="3500000"/>
-          </a:xfrm>
-          <a:prstGeom prst="rect">
-            <a:avLst/>
-          </a:prstGeom>
-          <a:noFill/>
-        </p:spPr>
-        <p:txBody>
-          <a:bodyPr wrap="square">
-            <a:spAutoFit/>
-          </a:bodyPr>
-          <a:lstStyle/>
-          <a:p>
-            <a:pPr>
-              <a:spcAft>
-                <a:spcPts val="1080"/>
-              </a:spcAft>
-            </a:pPr>
-            <a:r>
-              <a:rPr sz="2400" b="1">
-                <a:solidFill>
-                  <a:srgbClr val="E8793A"/>
-                </a:solidFill>
-                <a:latin typeface="Nunito Sans"/>
-              </a:rPr>
-              <a:t>1. </a:t>
-            </a:r>
-            <a:r>
-              <a:rPr sz="2400" b="0">
-                <a:solidFill>
-                  <a:srgbClr val="1F2A44"/>
-                </a:solidFill>
-                <a:latin typeface="Nunito Sans"/>
-              </a:rPr>
-              <a:t>¿Qué dos opciones le dan a esa chica? Ir toda la noche, o dejar de ser de la cuadrilla.</a:t>
-            </a:r>
-          </a:p>
-          <a:p>
-            <a:pPr>
-              <a:spcAft>
-                <a:spcPts val="1080"/>
-              </a:spcAft>
-            </a:pPr>
-            <a:r>
-              <a:rPr sz="2400" b="1">
-                <a:solidFill>
-                  <a:srgbClr val="E8793A"/>
-                </a:solidFill>
-                <a:latin typeface="Nunito Sans"/>
-              </a:rPr>
-              <a:t>2. </a:t>
-            </a:r>
-            <a:r>
-              <a:rPr sz="2400" b="0">
-                <a:solidFill>
-                  <a:srgbClr val="1F2A44"/>
-                </a:solidFill>
-                <a:latin typeface="Nunito Sans"/>
-              </a:rPr>
-              <a:t>¿Hay más? Sí: ir un rato, ir otro día, seguir siendo amigos sin ir.</a:t>
-            </a:r>
-          </a:p>
-          <a:p>
-            <a:pPr>
-              <a:spcAft>
-                <a:spcPts val="1080"/>
-              </a:spcAft>
-            </a:pPr>
-            <a:r>
-              <a:rPr sz="2400" b="1">
-                <a:solidFill>
-                  <a:srgbClr val="E8793A"/>
-                </a:solidFill>
-                <a:latin typeface="Nunito Sans"/>
-              </a:rPr>
-              <a:t>3. </a:t>
-            </a:r>
-            <a:r>
-              <a:rPr sz="2400" b="0">
-                <a:solidFill>
-                  <a:srgbClr val="1F2A44"/>
-                </a:solidFill>
-                <a:latin typeface="Nunito Sans"/>
-              </a:rPr>
-              <a:t>¿Para qué sirve el dilema? Para empujarla: la otra opción da miedo.</a:t>
-            </a:r>
-          </a:p>
-          <a:p>
-            <a:pPr>
-              <a:spcAft>
-                <a:spcPts val="1080"/>
-              </a:spcAft>
-            </a:pPr>
-            <a:r>
-              <a:rPr sz="2400" b="1">
-                <a:solidFill>
-                  <a:srgbClr val="E8793A"/>
-                </a:solidFill>
-                <a:latin typeface="Nunito Sans"/>
-              </a:rPr>
-              <a:t>4. </a:t>
-            </a:r>
-            <a:r>
-              <a:rPr sz="2400" b="0">
-                <a:solidFill>
-                  <a:srgbClr val="1F2A44"/>
-                </a:solidFill>
-                <a:latin typeface="Nunito Sans"/>
-              </a:rPr>
-              <a:t>Conclusión: falso dilema. Hay más salidas de las que dicen.</a:t>
             </a:r>
           </a:p>
         </p:txBody>
